--- a/output/Classificação Incremental e Auditável de Crimes em Notícias.pptx
+++ b/output/Classificação Incremental e Auditável de Crimes em Notícias.pptx
@@ -123,6 +123,11 @@
       </a:defRPr>
     </a:lvl9pPr>
   </p:defaultTextStyle>
+  <p:extLst>
+    <p:ext uri="{EFAFB233-063F-42B5-8137-9DF3F51BA10A}">
+      <p15:sldGuideLst xmlns:p15="http://schemas.microsoft.com/office/powerpoint/2012/main"/>
+    </p:ext>
+  </p:extLst>
 </p:presentation>
 </file>
 
@@ -176,7 +181,7 @@
           <a:noFill/>
           <a:extLst>
             <a:ext uri="{909E8E84-426E-40dd-AFC4-6F175D3DCCD1}">
-              <a14:hiddenFill xmlns:a14="http://schemas.microsoft.com/office/drawing/2010/main" xmlns="">
+              <a14:hiddenFill xmlns="" xmlns:a14="http://schemas.microsoft.com/office/drawing/2010/main">
                 <a:solidFill>
                   <a:srgbClr val="FFFFFF"/>
                 </a:solidFill>
@@ -236,7 +241,7 @@
             </a:ln>
             <a:extLst>
               <a:ext uri="{91240B29-F687-4f45-9708-019B960494DF}">
-                <a14:hiddenLine xmlns:a14="http://schemas.microsoft.com/office/drawing/2010/main" xmlns="" w="9525">
+                <a14:hiddenLine xmlns="" xmlns:a14="http://schemas.microsoft.com/office/drawing/2010/main" w="9525">
                   <a:solidFill>
                     <a:srgbClr val="000000"/>
                   </a:solidFill>
@@ -333,7 +338,7 @@
             </a:ln>
             <a:extLst>
               <a:ext uri="{91240B29-F687-4f45-9708-019B960494DF}">
-                <a14:hiddenLine xmlns:a14="http://schemas.microsoft.com/office/drawing/2010/main" xmlns="" w="9525">
+                <a14:hiddenLine xmlns="" xmlns:a14="http://schemas.microsoft.com/office/drawing/2010/main" w="9525">
                   <a:solidFill>
                     <a:srgbClr val="000000"/>
                   </a:solidFill>
@@ -430,7 +435,7 @@
             </a:ln>
             <a:extLst>
               <a:ext uri="{91240B29-F687-4f45-9708-019B960494DF}">
-                <a14:hiddenLine xmlns:a14="http://schemas.microsoft.com/office/drawing/2010/main" xmlns="" w="9525">
+                <a14:hiddenLine xmlns="" xmlns:a14="http://schemas.microsoft.com/office/drawing/2010/main" w="9525">
                   <a:solidFill>
                     <a:srgbClr val="000000"/>
                   </a:solidFill>
@@ -471,7 +476,7 @@
             </a:ln>
             <a:extLst>
               <a:ext uri="{91240B29-F687-4f45-9708-019B960494DF}">
-                <a14:hiddenLine xmlns:a14="http://schemas.microsoft.com/office/drawing/2010/main" xmlns="" w="9525">
+                <a14:hiddenLine xmlns="" xmlns:a14="http://schemas.microsoft.com/office/drawing/2010/main" w="9525">
                   <a:solidFill>
                     <a:srgbClr val="000000"/>
                   </a:solidFill>
@@ -568,7 +573,7 @@
             </a:ln>
             <a:extLst>
               <a:ext uri="{91240B29-F687-4f45-9708-019B960494DF}">
-                <a14:hiddenLine xmlns:a14="http://schemas.microsoft.com/office/drawing/2010/main" xmlns="" w="9525">
+                <a14:hiddenLine xmlns="" xmlns:a14="http://schemas.microsoft.com/office/drawing/2010/main" w="9525">
                   <a:solidFill>
                     <a:srgbClr val="000000"/>
                   </a:solidFill>
@@ -637,7 +642,7 @@
             </a:ln>
             <a:extLst>
               <a:ext uri="{91240B29-F687-4f45-9708-019B960494DF}">
-                <a14:hiddenLine xmlns:a14="http://schemas.microsoft.com/office/drawing/2010/main" xmlns="" w="9525">
+                <a14:hiddenLine xmlns="" xmlns:a14="http://schemas.microsoft.com/office/drawing/2010/main" w="9525">
                   <a:solidFill>
                     <a:srgbClr val="000000"/>
                   </a:solidFill>
@@ -706,7 +711,7 @@
             </a:ln>
             <a:extLst>
               <a:ext uri="{91240B29-F687-4f45-9708-019B960494DF}">
-                <a14:hiddenLine xmlns:a14="http://schemas.microsoft.com/office/drawing/2010/main" xmlns="" w="9525">
+                <a14:hiddenLine xmlns="" xmlns:a14="http://schemas.microsoft.com/office/drawing/2010/main" w="9525">
                   <a:solidFill>
                     <a:srgbClr val="000000"/>
                   </a:solidFill>
@@ -803,7 +808,7 @@
             </a:ln>
             <a:extLst>
               <a:ext uri="{91240B29-F687-4f45-9708-019B960494DF}">
-                <a14:hiddenLine xmlns:a14="http://schemas.microsoft.com/office/drawing/2010/main" xmlns="" w="9525">
+                <a14:hiddenLine xmlns="" xmlns:a14="http://schemas.microsoft.com/office/drawing/2010/main" w="9525">
                   <a:solidFill>
                     <a:srgbClr val="000000"/>
                   </a:solidFill>
@@ -872,7 +877,7 @@
             </a:ln>
             <a:extLst>
               <a:ext uri="{91240B29-F687-4f45-9708-019B960494DF}">
-                <a14:hiddenLine xmlns:a14="http://schemas.microsoft.com/office/drawing/2010/main" xmlns="" w="9525">
+                <a14:hiddenLine xmlns="" xmlns:a14="http://schemas.microsoft.com/office/drawing/2010/main" w="9525">
                   <a:solidFill>
                     <a:srgbClr val="000000"/>
                   </a:solidFill>
@@ -941,7 +946,7 @@
             </a:ln>
             <a:extLst>
               <a:ext uri="{91240B29-F687-4f45-9708-019B960494DF}">
-                <a14:hiddenLine xmlns:a14="http://schemas.microsoft.com/office/drawing/2010/main" xmlns="" w="9525">
+                <a14:hiddenLine xmlns="" xmlns:a14="http://schemas.microsoft.com/office/drawing/2010/main" w="9525">
                   <a:solidFill>
                     <a:srgbClr val="000000"/>
                   </a:solidFill>
@@ -1038,7 +1043,7 @@
             </a:ln>
             <a:extLst>
               <a:ext uri="{91240B29-F687-4f45-9708-019B960494DF}">
-                <a14:hiddenLine xmlns:a14="http://schemas.microsoft.com/office/drawing/2010/main" xmlns="" w="9525">
+                <a14:hiddenLine xmlns="" xmlns:a14="http://schemas.microsoft.com/office/drawing/2010/main" w="9525">
                   <a:solidFill>
                     <a:srgbClr val="000000"/>
                   </a:solidFill>
@@ -1135,7 +1140,7 @@
             </a:ln>
             <a:extLst>
               <a:ext uri="{91240B29-F687-4f45-9708-019B960494DF}">
-                <a14:hiddenLine xmlns:a14="http://schemas.microsoft.com/office/drawing/2010/main" xmlns="" w="9525">
+                <a14:hiddenLine xmlns="" xmlns:a14="http://schemas.microsoft.com/office/drawing/2010/main" w="9525">
                   <a:solidFill>
                     <a:srgbClr val="000000"/>
                   </a:solidFill>
@@ -1204,7 +1209,7 @@
             </a:ln>
             <a:extLst>
               <a:ext uri="{91240B29-F687-4f45-9708-019B960494DF}">
-                <a14:hiddenLine xmlns:a14="http://schemas.microsoft.com/office/drawing/2010/main" xmlns="" w="9525">
+                <a14:hiddenLine xmlns="" xmlns:a14="http://schemas.microsoft.com/office/drawing/2010/main" w="9525">
                   <a:solidFill>
                     <a:srgbClr val="000000"/>
                   </a:solidFill>
@@ -1321,7 +1326,7 @@
             </a:ln>
             <a:extLst>
               <a:ext uri="{91240B29-F687-4f45-9708-019B960494DF}">
-                <a14:hiddenLine xmlns:a14="http://schemas.microsoft.com/office/drawing/2010/main" xmlns="" w="9525">
+                <a14:hiddenLine xmlns="" xmlns:a14="http://schemas.microsoft.com/office/drawing/2010/main" w="9525">
                   <a:solidFill>
                     <a:srgbClr val="000000"/>
                   </a:solidFill>
@@ -1390,7 +1395,7 @@
             </a:ln>
             <a:extLst>
               <a:ext uri="{91240B29-F687-4f45-9708-019B960494DF}">
-                <a14:hiddenLine xmlns:a14="http://schemas.microsoft.com/office/drawing/2010/main" xmlns="" w="9525">
+                <a14:hiddenLine xmlns="" xmlns:a14="http://schemas.microsoft.com/office/drawing/2010/main" w="9525">
                   <a:solidFill>
                     <a:srgbClr val="000000"/>
                   </a:solidFill>
@@ -1487,7 +1492,7 @@
             </a:ln>
             <a:extLst>
               <a:ext uri="{91240B29-F687-4f45-9708-019B960494DF}">
-                <a14:hiddenLine xmlns:a14="http://schemas.microsoft.com/office/drawing/2010/main" xmlns="" w="9525">
+                <a14:hiddenLine xmlns="" xmlns:a14="http://schemas.microsoft.com/office/drawing/2010/main" w="9525">
                   <a:solidFill>
                     <a:srgbClr val="000000"/>
                   </a:solidFill>
@@ -1584,7 +1589,7 @@
             </a:ln>
             <a:extLst>
               <a:ext uri="{91240B29-F687-4f45-9708-019B960494DF}">
-                <a14:hiddenLine xmlns:a14="http://schemas.microsoft.com/office/drawing/2010/main" xmlns="" w="9525">
+                <a14:hiddenLine xmlns="" xmlns:a14="http://schemas.microsoft.com/office/drawing/2010/main" w="9525">
                   <a:solidFill>
                     <a:srgbClr val="000000"/>
                   </a:solidFill>
@@ -1653,7 +1658,7 @@
             </a:ln>
             <a:extLst>
               <a:ext uri="{91240B29-F687-4f45-9708-019B960494DF}">
-                <a14:hiddenLine xmlns:a14="http://schemas.microsoft.com/office/drawing/2010/main" xmlns="" w="9525">
+                <a14:hiddenLine xmlns="" xmlns:a14="http://schemas.microsoft.com/office/drawing/2010/main" w="9525">
                   <a:solidFill>
                     <a:srgbClr val="000000"/>
                   </a:solidFill>
@@ -1750,7 +1755,7 @@
             </a:ln>
             <a:extLst>
               <a:ext uri="{91240B29-F687-4f45-9708-019B960494DF}">
-                <a14:hiddenLine xmlns:a14="http://schemas.microsoft.com/office/drawing/2010/main" xmlns="" w="9525">
+                <a14:hiddenLine xmlns="" xmlns:a14="http://schemas.microsoft.com/office/drawing/2010/main" w="9525">
                   <a:solidFill>
                     <a:srgbClr val="000000"/>
                   </a:solidFill>
@@ -1847,7 +1852,7 @@
             </a:ln>
             <a:extLst>
               <a:ext uri="{91240B29-F687-4f45-9708-019B960494DF}">
-                <a14:hiddenLine xmlns:a14="http://schemas.microsoft.com/office/drawing/2010/main" xmlns="" w="9525">
+                <a14:hiddenLine xmlns="" xmlns:a14="http://schemas.microsoft.com/office/drawing/2010/main" w="9525">
                   <a:solidFill>
                     <a:srgbClr val="000000"/>
                   </a:solidFill>
@@ -1910,7 +1915,7 @@
             </a:ln>
             <a:extLst>
               <a:ext uri="{91240B29-F687-4f45-9708-019B960494DF}">
-                <a14:hiddenLine xmlns:a14="http://schemas.microsoft.com/office/drawing/2010/main" xmlns="" w="9525">
+                <a14:hiddenLine xmlns="" xmlns:a14="http://schemas.microsoft.com/office/drawing/2010/main" w="9525">
                   <a:solidFill>
                     <a:srgbClr val="000000"/>
                   </a:solidFill>
@@ -2007,7 +2012,7 @@
             </a:ln>
             <a:extLst>
               <a:ext uri="{91240B29-F687-4f45-9708-019B960494DF}">
-                <a14:hiddenLine xmlns:a14="http://schemas.microsoft.com/office/drawing/2010/main" xmlns="" w="9525">
+                <a14:hiddenLine xmlns="" xmlns:a14="http://schemas.microsoft.com/office/drawing/2010/main" w="9525">
                   <a:solidFill>
                     <a:srgbClr val="000000"/>
                   </a:solidFill>
@@ -2070,7 +2075,7 @@
             </a:ln>
             <a:extLst>
               <a:ext uri="{91240B29-F687-4f45-9708-019B960494DF}">
-                <a14:hiddenLine xmlns:a14="http://schemas.microsoft.com/office/drawing/2010/main" xmlns="" w="9525">
+                <a14:hiddenLine xmlns="" xmlns:a14="http://schemas.microsoft.com/office/drawing/2010/main" w="9525">
                   <a:solidFill>
                     <a:srgbClr val="000000"/>
                   </a:solidFill>
@@ -2167,7 +2172,7 @@
             </a:ln>
             <a:extLst>
               <a:ext uri="{91240B29-F687-4f45-9708-019B960494DF}">
-                <a14:hiddenLine xmlns:a14="http://schemas.microsoft.com/office/drawing/2010/main" xmlns="" w="9525">
+                <a14:hiddenLine xmlns="" xmlns:a14="http://schemas.microsoft.com/office/drawing/2010/main" w="9525">
                   <a:solidFill>
                     <a:srgbClr val="000000"/>
                   </a:solidFill>
@@ -2242,7 +2247,7 @@
             </a:ln>
             <a:extLst>
               <a:ext uri="{91240B29-F687-4f45-9708-019B960494DF}">
-                <a14:hiddenLine xmlns:a14="http://schemas.microsoft.com/office/drawing/2010/main" xmlns="" w="9525">
+                <a14:hiddenLine xmlns="" xmlns:a14="http://schemas.microsoft.com/office/drawing/2010/main" w="9525">
                   <a:solidFill>
                     <a:srgbClr val="000000"/>
                   </a:solidFill>
@@ -2339,7 +2344,7 @@
             </a:ln>
             <a:extLst>
               <a:ext uri="{91240B29-F687-4f45-9708-019B960494DF}">
-                <a14:hiddenLine xmlns:a14="http://schemas.microsoft.com/office/drawing/2010/main" xmlns="" w="9525">
+                <a14:hiddenLine xmlns="" xmlns:a14="http://schemas.microsoft.com/office/drawing/2010/main" w="9525">
                   <a:solidFill>
                     <a:srgbClr val="000000"/>
                   </a:solidFill>
@@ -2414,7 +2419,7 @@
             </a:ln>
             <a:extLst>
               <a:ext uri="{91240B29-F687-4f45-9708-019B960494DF}">
-                <a14:hiddenLine xmlns:a14="http://schemas.microsoft.com/office/drawing/2010/main" xmlns="" w="9525">
+                <a14:hiddenLine xmlns="" xmlns:a14="http://schemas.microsoft.com/office/drawing/2010/main" w="9525">
                   <a:solidFill>
                     <a:srgbClr val="000000"/>
                   </a:solidFill>
@@ -2511,7 +2516,7 @@
             </a:ln>
             <a:extLst>
               <a:ext uri="{91240B29-F687-4f45-9708-019B960494DF}">
-                <a14:hiddenLine xmlns:a14="http://schemas.microsoft.com/office/drawing/2010/main" xmlns="" w="9525">
+                <a14:hiddenLine xmlns="" xmlns:a14="http://schemas.microsoft.com/office/drawing/2010/main" w="9525">
                   <a:solidFill>
                     <a:srgbClr val="000000"/>
                   </a:solidFill>
@@ -2552,7 +2557,7 @@
             </a:ln>
             <a:extLst>
               <a:ext uri="{91240B29-F687-4f45-9708-019B960494DF}">
-                <a14:hiddenLine xmlns:a14="http://schemas.microsoft.com/office/drawing/2010/main" xmlns="" w="9525">
+                <a14:hiddenLine xmlns="" xmlns:a14="http://schemas.microsoft.com/office/drawing/2010/main" w="9525">
                   <a:solidFill>
                     <a:srgbClr val="000000"/>
                   </a:solidFill>
@@ -2649,7 +2654,7 @@
             </a:ln>
             <a:extLst>
               <a:ext uri="{91240B29-F687-4f45-9708-019B960494DF}">
-                <a14:hiddenLine xmlns:a14="http://schemas.microsoft.com/office/drawing/2010/main" xmlns="" w="9525">
+                <a14:hiddenLine xmlns="" xmlns:a14="http://schemas.microsoft.com/office/drawing/2010/main" w="9525">
                   <a:solidFill>
                     <a:srgbClr val="000000"/>
                   </a:solidFill>
@@ -2718,7 +2723,7 @@
             </a:ln>
             <a:extLst>
               <a:ext uri="{91240B29-F687-4f45-9708-019B960494DF}">
-                <a14:hiddenLine xmlns:a14="http://schemas.microsoft.com/office/drawing/2010/main" xmlns="" w="9525">
+                <a14:hiddenLine xmlns="" xmlns:a14="http://schemas.microsoft.com/office/drawing/2010/main" w="9525">
                   <a:solidFill>
                     <a:srgbClr val="000000"/>
                   </a:solidFill>
@@ -2787,7 +2792,7 @@
             </a:ln>
             <a:extLst>
               <a:ext uri="{91240B29-F687-4f45-9708-019B960494DF}">
-                <a14:hiddenLine xmlns:a14="http://schemas.microsoft.com/office/drawing/2010/main" xmlns="" w="9525">
+                <a14:hiddenLine xmlns="" xmlns:a14="http://schemas.microsoft.com/office/drawing/2010/main" w="9525">
                   <a:solidFill>
                     <a:srgbClr val="000000"/>
                   </a:solidFill>
@@ -2884,7 +2889,7 @@
             </a:ln>
             <a:extLst>
               <a:ext uri="{91240B29-F687-4f45-9708-019B960494DF}">
-                <a14:hiddenLine xmlns:a14="http://schemas.microsoft.com/office/drawing/2010/main" xmlns="" w="9525">
+                <a14:hiddenLine xmlns="" xmlns:a14="http://schemas.microsoft.com/office/drawing/2010/main" w="9525">
                   <a:solidFill>
                     <a:srgbClr val="000000"/>
                   </a:solidFill>
@@ -2959,7 +2964,7 @@
             </a:ln>
             <a:extLst>
               <a:ext uri="{91240B29-F687-4f45-9708-019B960494DF}">
-                <a14:hiddenLine xmlns:a14="http://schemas.microsoft.com/office/drawing/2010/main" xmlns="" w="9525">
+                <a14:hiddenLine xmlns="" xmlns:a14="http://schemas.microsoft.com/office/drawing/2010/main" w="9525">
                   <a:solidFill>
                     <a:srgbClr val="000000"/>
                   </a:solidFill>
@@ -3028,7 +3033,7 @@
             </a:ln>
             <a:extLst>
               <a:ext uri="{91240B29-F687-4f45-9708-019B960494DF}">
-                <a14:hiddenLine xmlns:a14="http://schemas.microsoft.com/office/drawing/2010/main" xmlns="" w="9525">
+                <a14:hiddenLine xmlns="" xmlns:a14="http://schemas.microsoft.com/office/drawing/2010/main" w="9525">
                   <a:solidFill>
                     <a:srgbClr val="000000"/>
                   </a:solidFill>
@@ -3125,7 +3130,7 @@
             </a:ln>
             <a:extLst>
               <a:ext uri="{91240B29-F687-4f45-9708-019B960494DF}">
-                <a14:hiddenLine xmlns:a14="http://schemas.microsoft.com/office/drawing/2010/main" xmlns="" w="9525">
+                <a14:hiddenLine xmlns="" xmlns:a14="http://schemas.microsoft.com/office/drawing/2010/main" w="9525">
                   <a:solidFill>
                     <a:srgbClr val="000000"/>
                   </a:solidFill>
@@ -3194,7 +3199,7 @@
             </a:ln>
             <a:extLst>
               <a:ext uri="{91240B29-F687-4f45-9708-019B960494DF}">
-                <a14:hiddenLine xmlns:a14="http://schemas.microsoft.com/office/drawing/2010/main" xmlns="" w="9525">
+                <a14:hiddenLine xmlns="" xmlns:a14="http://schemas.microsoft.com/office/drawing/2010/main" w="9525">
                   <a:solidFill>
                     <a:srgbClr val="000000"/>
                   </a:solidFill>
@@ -3291,7 +3296,7 @@
             </a:ln>
             <a:extLst>
               <a:ext uri="{91240B29-F687-4f45-9708-019B960494DF}">
-                <a14:hiddenLine xmlns:a14="http://schemas.microsoft.com/office/drawing/2010/main" xmlns="" w="9525">
+                <a14:hiddenLine xmlns="" xmlns:a14="http://schemas.microsoft.com/office/drawing/2010/main" w="9525">
                   <a:solidFill>
                     <a:srgbClr val="000000"/>
                   </a:solidFill>
@@ -3360,7 +3365,7 @@
             </a:ln>
             <a:extLst>
               <a:ext uri="{91240B29-F687-4f45-9708-019B960494DF}">
-                <a14:hiddenLine xmlns:a14="http://schemas.microsoft.com/office/drawing/2010/main" xmlns="" w="9525">
+                <a14:hiddenLine xmlns="" xmlns:a14="http://schemas.microsoft.com/office/drawing/2010/main" w="9525">
                   <a:solidFill>
                     <a:srgbClr val="000000"/>
                   </a:solidFill>
@@ -3457,7 +3462,7 @@
             </a:ln>
             <a:extLst>
               <a:ext uri="{91240B29-F687-4f45-9708-019B960494DF}">
-                <a14:hiddenLine xmlns:a14="http://schemas.microsoft.com/office/drawing/2010/main" xmlns="" w="9525">
+                <a14:hiddenLine xmlns="" xmlns:a14="http://schemas.microsoft.com/office/drawing/2010/main" w="9525">
                   <a:solidFill>
                     <a:srgbClr val="000000"/>
                   </a:solidFill>
@@ -3498,7 +3503,7 @@
             </a:ln>
             <a:extLst>
               <a:ext uri="{91240B29-F687-4f45-9708-019B960494DF}">
-                <a14:hiddenLine xmlns:a14="http://schemas.microsoft.com/office/drawing/2010/main" xmlns="" w="9525">
+                <a14:hiddenLine xmlns="" xmlns:a14="http://schemas.microsoft.com/office/drawing/2010/main" w="9525">
                   <a:solidFill>
                     <a:srgbClr val="000000"/>
                   </a:solidFill>
@@ -3570,7 +3575,7 @@
             </a:ln>
             <a:extLst>
               <a:ext uri="{91240B29-F687-4f45-9708-019B960494DF}">
-                <a14:hiddenLine xmlns:a14="http://schemas.microsoft.com/office/drawing/2010/main" xmlns="" w="9525">
+                <a14:hiddenLine xmlns="" xmlns:a14="http://schemas.microsoft.com/office/drawing/2010/main" w="9525">
                   <a:solidFill>
                     <a:srgbClr val="000000"/>
                   </a:solidFill>
@@ -3667,7 +3672,7 @@
             </a:ln>
             <a:extLst>
               <a:ext uri="{91240B29-F687-4f45-9708-019B960494DF}">
-                <a14:hiddenLine xmlns:a14="http://schemas.microsoft.com/office/drawing/2010/main" xmlns="" w="9525">
+                <a14:hiddenLine xmlns="" xmlns:a14="http://schemas.microsoft.com/office/drawing/2010/main" w="9525">
                   <a:solidFill>
                     <a:srgbClr val="000000"/>
                   </a:solidFill>
@@ -3736,7 +3741,7 @@
             </a:ln>
             <a:extLst>
               <a:ext uri="{91240B29-F687-4f45-9708-019B960494DF}">
-                <a14:hiddenLine xmlns:a14="http://schemas.microsoft.com/office/drawing/2010/main" xmlns="" w="9525">
+                <a14:hiddenLine xmlns="" xmlns:a14="http://schemas.microsoft.com/office/drawing/2010/main" w="9525">
                   <a:solidFill>
                     <a:srgbClr val="000000"/>
                   </a:solidFill>
@@ -3833,7 +3838,7 @@
             </a:ln>
             <a:extLst>
               <a:ext uri="{91240B29-F687-4f45-9708-019B960494DF}">
-                <a14:hiddenLine xmlns:a14="http://schemas.microsoft.com/office/drawing/2010/main" xmlns="" w="9525">
+                <a14:hiddenLine xmlns="" xmlns:a14="http://schemas.microsoft.com/office/drawing/2010/main" w="9525">
                   <a:solidFill>
                     <a:srgbClr val="000000"/>
                   </a:solidFill>
@@ -3930,7 +3935,7 @@
             </a:ln>
             <a:extLst>
               <a:ext uri="{91240B29-F687-4f45-9708-019B960494DF}">
-                <a14:hiddenLine xmlns:a14="http://schemas.microsoft.com/office/drawing/2010/main" xmlns="" w="9525">
+                <a14:hiddenLine xmlns="" xmlns:a14="http://schemas.microsoft.com/office/drawing/2010/main" w="9525">
                   <a:solidFill>
                     <a:srgbClr val="000000"/>
                   </a:solidFill>
@@ -4002,7 +4007,7 @@
             </a:ln>
             <a:extLst>
               <a:ext uri="{91240B29-F687-4f45-9708-019B960494DF}">
-                <a14:hiddenLine xmlns:a14="http://schemas.microsoft.com/office/drawing/2010/main" xmlns="" w="9525">
+                <a14:hiddenLine xmlns="" xmlns:a14="http://schemas.microsoft.com/office/drawing/2010/main" w="9525">
                   <a:solidFill>
                     <a:srgbClr val="000000"/>
                   </a:solidFill>
@@ -4071,7 +4076,7 @@
             </a:ln>
             <a:extLst>
               <a:ext uri="{91240B29-F687-4f45-9708-019B960494DF}">
-                <a14:hiddenLine xmlns:a14="http://schemas.microsoft.com/office/drawing/2010/main" xmlns="" w="9525">
+                <a14:hiddenLine xmlns="" xmlns:a14="http://schemas.microsoft.com/office/drawing/2010/main" w="9525">
                   <a:solidFill>
                     <a:srgbClr val="000000"/>
                   </a:solidFill>
@@ -4168,7 +4173,7 @@
             </a:ln>
             <a:extLst>
               <a:ext uri="{91240B29-F687-4f45-9708-019B960494DF}">
-                <a14:hiddenLine xmlns:a14="http://schemas.microsoft.com/office/drawing/2010/main" xmlns="" w="9525">
+                <a14:hiddenLine xmlns="" xmlns:a14="http://schemas.microsoft.com/office/drawing/2010/main" w="9525">
                   <a:solidFill>
                     <a:srgbClr val="000000"/>
                   </a:solidFill>
@@ -4265,7 +4270,7 @@
             </a:ln>
             <a:extLst>
               <a:ext uri="{91240B29-F687-4f45-9708-019B960494DF}">
-                <a14:hiddenLine xmlns:a14="http://schemas.microsoft.com/office/drawing/2010/main" xmlns="" w="9525">
+                <a14:hiddenLine xmlns="" xmlns:a14="http://schemas.microsoft.com/office/drawing/2010/main" w="9525">
                   <a:solidFill>
                     <a:srgbClr val="000000"/>
                   </a:solidFill>
@@ -4334,7 +4339,7 @@
             </a:ln>
             <a:extLst>
               <a:ext uri="{91240B29-F687-4f45-9708-019B960494DF}">
-                <a14:hiddenLine xmlns:a14="http://schemas.microsoft.com/office/drawing/2010/main" xmlns="" w="9525">
+                <a14:hiddenLine xmlns="" xmlns:a14="http://schemas.microsoft.com/office/drawing/2010/main" w="9525">
                   <a:solidFill>
                     <a:srgbClr val="000000"/>
                   </a:solidFill>
@@ -4461,7 +4466,7 @@
             </a:ln>
             <a:extLst>
               <a:ext uri="{91240B29-F687-4f45-9708-019B960494DF}">
-                <a14:hiddenLine xmlns:a14="http://schemas.microsoft.com/office/drawing/2010/main" xmlns="" w="9525">
+                <a14:hiddenLine xmlns="" xmlns:a14="http://schemas.microsoft.com/office/drawing/2010/main" w="9525">
                   <a:solidFill>
                     <a:srgbClr val="000000"/>
                   </a:solidFill>
@@ -4536,7 +4541,7 @@
             </a:ln>
             <a:extLst>
               <a:ext uri="{91240B29-F687-4f45-9708-019B960494DF}">
-                <a14:hiddenLine xmlns:a14="http://schemas.microsoft.com/office/drawing/2010/main" xmlns="" w="9525">
+                <a14:hiddenLine xmlns="" xmlns:a14="http://schemas.microsoft.com/office/drawing/2010/main" w="9525">
                   <a:solidFill>
                     <a:srgbClr val="000000"/>
                   </a:solidFill>
@@ -4633,7 +4638,7 @@
             </a:ln>
             <a:extLst>
               <a:ext uri="{91240B29-F687-4f45-9708-019B960494DF}">
-                <a14:hiddenLine xmlns:a14="http://schemas.microsoft.com/office/drawing/2010/main" xmlns="" w="9525">
+                <a14:hiddenLine xmlns="" xmlns:a14="http://schemas.microsoft.com/office/drawing/2010/main" w="9525">
                   <a:solidFill>
                     <a:srgbClr val="000000"/>
                   </a:solidFill>
@@ -4780,7 +4785,7 @@
           <a:p>
             <a:fld id="{48A87A34-81AB-432B-8DAE-1953F412C126}" type="datetimeFigureOut">
               <a:rPr lang="en-US" dirty="0"/>
-              <a:t>7/26/2026</a:t>
+              <a:t>7/28/2026</a:t>
             </a:fld>
             <a:endParaRPr lang="en-US" dirty="0"/>
           </a:p>
@@ -5042,7 +5047,7 @@
           <a:p>
             <a:fld id="{48A87A34-81AB-432B-8DAE-1953F412C126}" type="datetimeFigureOut">
               <a:rPr lang="en-US" dirty="0"/>
-              <a:t>7/26/2026</a:t>
+              <a:t>7/28/2026</a:t>
             </a:fld>
             <a:endParaRPr lang="en-US" dirty="0"/>
           </a:p>
@@ -5233,7 +5238,7 @@
           <a:p>
             <a:fld id="{48A87A34-81AB-432B-8DAE-1953F412C126}" type="datetimeFigureOut">
               <a:rPr lang="en-US" dirty="0"/>
-              <a:t>7/26/2026</a:t>
+              <a:t>7/28/2026</a:t>
             </a:fld>
             <a:endParaRPr lang="en-US" dirty="0"/>
           </a:p>
@@ -5491,7 +5496,7 @@
           <a:p>
             <a:fld id="{48A87A34-81AB-432B-8DAE-1953F412C126}" type="datetimeFigureOut">
               <a:rPr lang="en-US" dirty="0"/>
-              <a:t>7/26/2026</a:t>
+              <a:t>7/28/2026</a:t>
             </a:fld>
             <a:endParaRPr lang="en-US" dirty="0"/>
           </a:p>
@@ -5920,7 +5925,7 @@
           <a:p>
             <a:fld id="{48A87A34-81AB-432B-8DAE-1953F412C126}" type="datetimeFigureOut">
               <a:rPr lang="en-US" dirty="0"/>
-              <a:t>7/26/2026</a:t>
+              <a:t>7/28/2026</a:t>
             </a:fld>
             <a:endParaRPr lang="en-US" dirty="0"/>
           </a:p>
@@ -6461,7 +6466,7 @@
           <a:p>
             <a:fld id="{48A87A34-81AB-432B-8DAE-1953F412C126}" type="datetimeFigureOut">
               <a:rPr lang="en-US" dirty="0"/>
-              <a:t>7/26/2026</a:t>
+              <a:t>7/28/2026</a:t>
             </a:fld>
             <a:endParaRPr lang="en-US" dirty="0"/>
           </a:p>
@@ -7176,7 +7181,7 @@
           <a:p>
             <a:fld id="{48A87A34-81AB-432B-8DAE-1953F412C126}" type="datetimeFigureOut">
               <a:rPr lang="en-US" dirty="0"/>
-              <a:t>7/26/2026</a:t>
+              <a:t>7/28/2026</a:t>
             </a:fld>
             <a:endParaRPr lang="en-US" dirty="0"/>
           </a:p>
@@ -7341,7 +7346,7 @@
           <a:p>
             <a:fld id="{48A87A34-81AB-432B-8DAE-1953F412C126}" type="datetimeFigureOut">
               <a:rPr lang="en-US" dirty="0"/>
-              <a:t>7/26/2026</a:t>
+              <a:t>7/28/2026</a:t>
             </a:fld>
             <a:endParaRPr lang="en-US" dirty="0"/>
           </a:p>
@@ -7516,7 +7521,7 @@
           <a:p>
             <a:fld id="{48A87A34-81AB-432B-8DAE-1953F412C126}" type="datetimeFigureOut">
               <a:rPr lang="en-US" dirty="0"/>
-              <a:t>7/26/2026</a:t>
+              <a:t>7/28/2026</a:t>
             </a:fld>
             <a:endParaRPr lang="en-US" dirty="0"/>
           </a:p>
@@ -7681,7 +7686,7 @@
           <a:p>
             <a:fld id="{48A87A34-81AB-432B-8DAE-1953F412C126}" type="datetimeFigureOut">
               <a:rPr lang="en-US" dirty="0"/>
-              <a:t>7/26/2026</a:t>
+              <a:t>7/28/2026</a:t>
             </a:fld>
             <a:endParaRPr lang="en-US" dirty="0"/>
           </a:p>
@@ -7926,7 +7931,7 @@
           <a:p>
             <a:fld id="{48A87A34-81AB-432B-8DAE-1953F412C126}" type="datetimeFigureOut">
               <a:rPr lang="en-US" dirty="0"/>
-              <a:t>7/26/2026</a:t>
+              <a:t>7/28/2026</a:t>
             </a:fld>
             <a:endParaRPr lang="en-US" dirty="0"/>
           </a:p>
@@ -8153,7 +8158,7 @@
           <a:p>
             <a:fld id="{48A87A34-81AB-432B-8DAE-1953F412C126}" type="datetimeFigureOut">
               <a:rPr lang="en-US" dirty="0"/>
-              <a:t>7/26/2026</a:t>
+              <a:t>7/28/2026</a:t>
             </a:fld>
             <a:endParaRPr lang="en-US" dirty="0"/>
           </a:p>
@@ -8529,7 +8534,7 @@
           <a:p>
             <a:fld id="{48A87A34-81AB-432B-8DAE-1953F412C126}" type="datetimeFigureOut">
               <a:rPr lang="en-US" dirty="0"/>
-              <a:t>7/26/2026</a:t>
+              <a:t>7/28/2026</a:t>
             </a:fld>
             <a:endParaRPr lang="en-US" dirty="0"/>
           </a:p>
@@ -8642,7 +8647,7 @@
           <a:p>
             <a:fld id="{48A87A34-81AB-432B-8DAE-1953F412C126}" type="datetimeFigureOut">
               <a:rPr lang="en-US" dirty="0"/>
-              <a:t>7/26/2026</a:t>
+              <a:t>7/28/2026</a:t>
             </a:fld>
             <a:endParaRPr lang="en-US" dirty="0"/>
           </a:p>
@@ -8732,7 +8737,7 @@
           <a:p>
             <a:fld id="{48A87A34-81AB-432B-8DAE-1953F412C126}" type="datetimeFigureOut">
               <a:rPr lang="en-US" dirty="0"/>
-              <a:t>7/26/2026</a:t>
+              <a:t>7/28/2026</a:t>
             </a:fld>
             <a:endParaRPr lang="en-US" dirty="0"/>
           </a:p>
@@ -8976,7 +8981,7 @@
           <a:p>
             <a:fld id="{48A87A34-81AB-432B-8DAE-1953F412C126}" type="datetimeFigureOut">
               <a:rPr lang="en-US" dirty="0"/>
-              <a:t>7/26/2026</a:t>
+              <a:t>7/28/2026</a:t>
             </a:fld>
             <a:endParaRPr lang="en-US" dirty="0"/>
           </a:p>
@@ -9251,7 +9256,7 @@
           <a:p>
             <a:fld id="{48A87A34-81AB-432B-8DAE-1953F412C126}" type="datetimeFigureOut">
               <a:rPr lang="en-US" dirty="0"/>
-              <a:t>7/26/2026</a:t>
+              <a:t>7/28/2026</a:t>
             </a:fld>
             <a:endParaRPr lang="en-US" dirty="0"/>
           </a:p>
@@ -9362,7 +9367,7 @@
           <a:noFill/>
           <a:extLst>
             <a:ext uri="{909E8E84-426E-40dd-AFC4-6F175D3DCCD1}">
-              <a14:hiddenFill xmlns:a14="http://schemas.microsoft.com/office/drawing/2010/main" xmlns="">
+              <a14:hiddenFill xmlns="" xmlns:a14="http://schemas.microsoft.com/office/drawing/2010/main">
                 <a:solidFill>
                   <a:srgbClr val="FFFFFF"/>
                 </a:solidFill>
@@ -9436,7 +9441,7 @@
               </a:ln>
               <a:extLst>
                 <a:ext uri="{91240B29-F687-4f45-9708-019B960494DF}">
-                  <a14:hiddenLine xmlns:a14="http://schemas.microsoft.com/office/drawing/2010/main" xmlns="" w="9525">
+                  <a14:hiddenLine xmlns="" xmlns:a14="http://schemas.microsoft.com/office/drawing/2010/main" w="9525">
                     <a:solidFill>
                       <a:srgbClr val="000000"/>
                     </a:solidFill>
@@ -9533,7 +9538,7 @@
               </a:ln>
               <a:extLst>
                 <a:ext uri="{91240B29-F687-4f45-9708-019B960494DF}">
-                  <a14:hiddenLine xmlns:a14="http://schemas.microsoft.com/office/drawing/2010/main" xmlns="" w="9525">
+                  <a14:hiddenLine xmlns="" xmlns:a14="http://schemas.microsoft.com/office/drawing/2010/main" w="9525">
                     <a:solidFill>
                       <a:srgbClr val="000000"/>
                     </a:solidFill>
@@ -9630,7 +9635,7 @@
               </a:ln>
               <a:extLst>
                 <a:ext uri="{91240B29-F687-4f45-9708-019B960494DF}">
-                  <a14:hiddenLine xmlns:a14="http://schemas.microsoft.com/office/drawing/2010/main" xmlns="" w="9525">
+                  <a14:hiddenLine xmlns="" xmlns:a14="http://schemas.microsoft.com/office/drawing/2010/main" w="9525">
                     <a:solidFill>
                       <a:srgbClr val="000000"/>
                     </a:solidFill>
@@ -9699,7 +9704,7 @@
               </a:ln>
               <a:extLst>
                 <a:ext uri="{91240B29-F687-4f45-9708-019B960494DF}">
-                  <a14:hiddenLine xmlns:a14="http://schemas.microsoft.com/office/drawing/2010/main" xmlns="" w="9525">
+                  <a14:hiddenLine xmlns="" xmlns:a14="http://schemas.microsoft.com/office/drawing/2010/main" w="9525">
                     <a:solidFill>
                       <a:srgbClr val="000000"/>
                     </a:solidFill>
@@ -9796,7 +9801,7 @@
               </a:ln>
               <a:extLst>
                 <a:ext uri="{91240B29-F687-4f45-9708-019B960494DF}">
-                  <a14:hiddenLine xmlns:a14="http://schemas.microsoft.com/office/drawing/2010/main" xmlns="" w="9525">
+                  <a14:hiddenLine xmlns="" xmlns:a14="http://schemas.microsoft.com/office/drawing/2010/main" w="9525">
                     <a:solidFill>
                       <a:srgbClr val="000000"/>
                     </a:solidFill>
@@ -9865,7 +9870,7 @@
               </a:ln>
               <a:extLst>
                 <a:ext uri="{91240B29-F687-4f45-9708-019B960494DF}">
-                  <a14:hiddenLine xmlns:a14="http://schemas.microsoft.com/office/drawing/2010/main" xmlns="" w="9525">
+                  <a14:hiddenLine xmlns="" xmlns:a14="http://schemas.microsoft.com/office/drawing/2010/main" w="9525">
                     <a:solidFill>
                       <a:srgbClr val="000000"/>
                     </a:solidFill>
@@ -9934,7 +9939,7 @@
               </a:ln>
               <a:extLst>
                 <a:ext uri="{91240B29-F687-4f45-9708-019B960494DF}">
-                  <a14:hiddenLine xmlns:a14="http://schemas.microsoft.com/office/drawing/2010/main" xmlns="" w="9525">
+                  <a14:hiddenLine xmlns="" xmlns:a14="http://schemas.microsoft.com/office/drawing/2010/main" w="9525">
                     <a:solidFill>
                       <a:srgbClr val="000000"/>
                     </a:solidFill>
@@ -10031,7 +10036,7 @@
               </a:ln>
               <a:extLst>
                 <a:ext uri="{91240B29-F687-4f45-9708-019B960494DF}">
-                  <a14:hiddenLine xmlns:a14="http://schemas.microsoft.com/office/drawing/2010/main" xmlns="" w="9525">
+                  <a14:hiddenLine xmlns="" xmlns:a14="http://schemas.microsoft.com/office/drawing/2010/main" w="9525">
                     <a:solidFill>
                       <a:srgbClr val="000000"/>
                     </a:solidFill>
@@ -10128,7 +10133,7 @@
               </a:ln>
               <a:extLst>
                 <a:ext uri="{91240B29-F687-4f45-9708-019B960494DF}">
-                  <a14:hiddenLine xmlns:a14="http://schemas.microsoft.com/office/drawing/2010/main" xmlns="" w="9525">
+                  <a14:hiddenLine xmlns="" xmlns:a14="http://schemas.microsoft.com/office/drawing/2010/main" w="9525">
                     <a:solidFill>
                       <a:srgbClr val="000000"/>
                     </a:solidFill>
@@ -10197,7 +10202,7 @@
               </a:ln>
               <a:extLst>
                 <a:ext uri="{91240B29-F687-4f45-9708-019B960494DF}">
-                  <a14:hiddenLine xmlns:a14="http://schemas.microsoft.com/office/drawing/2010/main" xmlns="" w="9525">
+                  <a14:hiddenLine xmlns="" xmlns:a14="http://schemas.microsoft.com/office/drawing/2010/main" w="9525">
                     <a:solidFill>
                       <a:srgbClr val="000000"/>
                     </a:solidFill>
@@ -10314,7 +10319,7 @@
               </a:ln>
               <a:extLst>
                 <a:ext uri="{91240B29-F687-4f45-9708-019B960494DF}">
-                  <a14:hiddenLine xmlns:a14="http://schemas.microsoft.com/office/drawing/2010/main" xmlns="" w="9525">
+                  <a14:hiddenLine xmlns="" xmlns:a14="http://schemas.microsoft.com/office/drawing/2010/main" w="9525">
                     <a:solidFill>
                       <a:srgbClr val="000000"/>
                     </a:solidFill>
@@ -10412,7 +10417,7 @@
               </a:ln>
               <a:extLst>
                 <a:ext uri="{91240B29-F687-4f45-9708-019B960494DF}">
-                  <a14:hiddenLine xmlns:a14="http://schemas.microsoft.com/office/drawing/2010/main" xmlns="" w="9525">
+                  <a14:hiddenLine xmlns="" xmlns:a14="http://schemas.microsoft.com/office/drawing/2010/main" w="9525">
                     <a:solidFill>
                       <a:srgbClr val="000000"/>
                     </a:solidFill>
@@ -10481,7 +10486,7 @@
               </a:ln>
               <a:extLst>
                 <a:ext uri="{91240B29-F687-4f45-9708-019B960494DF}">
-                  <a14:hiddenLine xmlns:a14="http://schemas.microsoft.com/office/drawing/2010/main" xmlns="" w="9525">
+                  <a14:hiddenLine xmlns="" xmlns:a14="http://schemas.microsoft.com/office/drawing/2010/main" w="9525">
                     <a:solidFill>
                       <a:srgbClr val="000000"/>
                     </a:solidFill>
@@ -10550,7 +10555,7 @@
               </a:ln>
               <a:extLst>
                 <a:ext uri="{91240B29-F687-4f45-9708-019B960494DF}">
-                  <a14:hiddenLine xmlns:a14="http://schemas.microsoft.com/office/drawing/2010/main" xmlns="" w="9525">
+                  <a14:hiddenLine xmlns="" xmlns:a14="http://schemas.microsoft.com/office/drawing/2010/main" w="9525">
                     <a:solidFill>
                       <a:srgbClr val="000000"/>
                     </a:solidFill>
@@ -10647,7 +10652,7 @@
               </a:ln>
               <a:extLst>
                 <a:ext uri="{91240B29-F687-4f45-9708-019B960494DF}">
-                  <a14:hiddenLine xmlns:a14="http://schemas.microsoft.com/office/drawing/2010/main" xmlns="" w="9525">
+                  <a14:hiddenLine xmlns="" xmlns:a14="http://schemas.microsoft.com/office/drawing/2010/main" w="9525">
                     <a:solidFill>
                       <a:srgbClr val="000000"/>
                     </a:solidFill>
@@ -10688,7 +10693,7 @@
               </a:ln>
               <a:extLst>
                 <a:ext uri="{91240B29-F687-4f45-9708-019B960494DF}">
-                  <a14:hiddenLine xmlns:a14="http://schemas.microsoft.com/office/drawing/2010/main" xmlns="" w="9525">
+                  <a14:hiddenLine xmlns="" xmlns:a14="http://schemas.microsoft.com/office/drawing/2010/main" w="9525">
                     <a:solidFill>
                       <a:srgbClr val="000000"/>
                     </a:solidFill>
@@ -10760,7 +10765,7 @@
               </a:ln>
               <a:extLst>
                 <a:ext uri="{91240B29-F687-4f45-9708-019B960494DF}">
-                  <a14:hiddenLine xmlns:a14="http://schemas.microsoft.com/office/drawing/2010/main" xmlns="" w="9525">
+                  <a14:hiddenLine xmlns="" xmlns:a14="http://schemas.microsoft.com/office/drawing/2010/main" w="9525">
                     <a:solidFill>
                       <a:srgbClr val="000000"/>
                     </a:solidFill>
@@ -10857,7 +10862,7 @@
               </a:ln>
               <a:extLst>
                 <a:ext uri="{91240B29-F687-4f45-9708-019B960494DF}">
-                  <a14:hiddenLine xmlns:a14="http://schemas.microsoft.com/office/drawing/2010/main" xmlns="" w="9525">
+                  <a14:hiddenLine xmlns="" xmlns:a14="http://schemas.microsoft.com/office/drawing/2010/main" w="9525">
                     <a:solidFill>
                       <a:srgbClr val="000000"/>
                     </a:solidFill>
@@ -10926,7 +10931,7 @@
               </a:ln>
               <a:extLst>
                 <a:ext uri="{91240B29-F687-4f45-9708-019B960494DF}">
-                  <a14:hiddenLine xmlns:a14="http://schemas.microsoft.com/office/drawing/2010/main" xmlns="" w="9525">
+                  <a14:hiddenLine xmlns="" xmlns:a14="http://schemas.microsoft.com/office/drawing/2010/main" w="9525">
                     <a:solidFill>
                       <a:srgbClr val="000000"/>
                     </a:solidFill>
@@ -11023,7 +11028,7 @@
               </a:ln>
               <a:extLst>
                 <a:ext uri="{91240B29-F687-4f45-9708-019B960494DF}">
-                  <a14:hiddenLine xmlns:a14="http://schemas.microsoft.com/office/drawing/2010/main" xmlns="" w="9525">
+                  <a14:hiddenLine xmlns="" xmlns:a14="http://schemas.microsoft.com/office/drawing/2010/main" w="9525">
                     <a:solidFill>
                       <a:srgbClr val="000000"/>
                     </a:solidFill>
@@ -11095,7 +11100,7 @@
               </a:ln>
               <a:extLst>
                 <a:ext uri="{91240B29-F687-4f45-9708-019B960494DF}">
-                  <a14:hiddenLine xmlns:a14="http://schemas.microsoft.com/office/drawing/2010/main" xmlns="" w="9525">
+                  <a14:hiddenLine xmlns="" xmlns:a14="http://schemas.microsoft.com/office/drawing/2010/main" w="9525">
                     <a:solidFill>
                       <a:srgbClr val="000000"/>
                     </a:solidFill>
@@ -11164,7 +11169,7 @@
               </a:ln>
               <a:extLst>
                 <a:ext uri="{91240B29-F687-4f45-9708-019B960494DF}">
-                  <a14:hiddenLine xmlns:a14="http://schemas.microsoft.com/office/drawing/2010/main" xmlns="" w="9525">
+                  <a14:hiddenLine xmlns="" xmlns:a14="http://schemas.microsoft.com/office/drawing/2010/main" w="9525">
                     <a:solidFill>
                       <a:srgbClr val="000000"/>
                     </a:solidFill>
@@ -11261,7 +11266,7 @@
               </a:ln>
               <a:extLst>
                 <a:ext uri="{91240B29-F687-4f45-9708-019B960494DF}">
-                  <a14:hiddenLine xmlns:a14="http://schemas.microsoft.com/office/drawing/2010/main" xmlns="" w="9525">
+                  <a14:hiddenLine xmlns="" xmlns:a14="http://schemas.microsoft.com/office/drawing/2010/main" w="9525">
                     <a:solidFill>
                       <a:srgbClr val="000000"/>
                     </a:solidFill>
@@ -11358,7 +11363,7 @@
               </a:ln>
               <a:extLst>
                 <a:ext uri="{91240B29-F687-4f45-9708-019B960494DF}">
-                  <a14:hiddenLine xmlns:a14="http://schemas.microsoft.com/office/drawing/2010/main" xmlns="" w="9525">
+                  <a14:hiddenLine xmlns="" xmlns:a14="http://schemas.microsoft.com/office/drawing/2010/main" w="9525">
                     <a:solidFill>
                       <a:srgbClr val="000000"/>
                     </a:solidFill>
@@ -11430,7 +11435,7 @@
               </a:ln>
               <a:extLst>
                 <a:ext uri="{91240B29-F687-4f45-9708-019B960494DF}">
-                  <a14:hiddenLine xmlns:a14="http://schemas.microsoft.com/office/drawing/2010/main" xmlns="" w="9525">
+                  <a14:hiddenLine xmlns="" xmlns:a14="http://schemas.microsoft.com/office/drawing/2010/main" w="9525">
                     <a:solidFill>
                       <a:srgbClr val="000000"/>
                     </a:solidFill>
@@ -11557,7 +11562,7 @@
               </a:ln>
               <a:extLst>
                 <a:ext uri="{91240B29-F687-4f45-9708-019B960494DF}">
-                  <a14:hiddenLine xmlns:a14="http://schemas.microsoft.com/office/drawing/2010/main" xmlns="" w="9525">
+                  <a14:hiddenLine xmlns="" xmlns:a14="http://schemas.microsoft.com/office/drawing/2010/main" w="9525">
                     <a:solidFill>
                       <a:srgbClr val="000000"/>
                     </a:solidFill>
@@ -11662,7 +11667,7 @@
               </a:ln>
               <a:extLst>
                 <a:ext uri="{91240B29-F687-4f45-9708-019B960494DF}">
-                  <a14:hiddenLine xmlns:a14="http://schemas.microsoft.com/office/drawing/2010/main" xmlns="" w="9525">
+                  <a14:hiddenLine xmlns="" xmlns:a14="http://schemas.microsoft.com/office/drawing/2010/main" w="9525">
                     <a:solidFill>
                       <a:srgbClr val="000000"/>
                     </a:solidFill>
@@ -11784,7 +11789,7 @@
               </a:ln>
               <a:extLst>
                 <a:ext uri="{91240B29-F687-4f45-9708-019B960494DF}">
-                  <a14:hiddenLine xmlns:a14="http://schemas.microsoft.com/office/drawing/2010/main" xmlns="" w="9525">
+                  <a14:hiddenLine xmlns="" xmlns:a14="http://schemas.microsoft.com/office/drawing/2010/main" w="9525">
                     <a:solidFill>
                       <a:srgbClr val="000000"/>
                     </a:solidFill>
@@ -11881,7 +11886,7 @@
               </a:ln>
               <a:extLst>
                 <a:ext uri="{91240B29-F687-4f45-9708-019B960494DF}">
-                  <a14:hiddenLine xmlns:a14="http://schemas.microsoft.com/office/drawing/2010/main" xmlns="" w="9525">
+                  <a14:hiddenLine xmlns="" xmlns:a14="http://schemas.microsoft.com/office/drawing/2010/main" w="9525">
                     <a:solidFill>
                       <a:srgbClr val="000000"/>
                     </a:solidFill>
@@ -11953,7 +11958,7 @@
               </a:ln>
               <a:extLst>
                 <a:ext uri="{91240B29-F687-4f45-9708-019B960494DF}">
-                  <a14:hiddenLine xmlns:a14="http://schemas.microsoft.com/office/drawing/2010/main" xmlns="" w="9525">
+                  <a14:hiddenLine xmlns="" xmlns:a14="http://schemas.microsoft.com/office/drawing/2010/main" w="9525">
                     <a:solidFill>
                       <a:srgbClr val="000000"/>
                     </a:solidFill>
@@ -12050,7 +12055,7 @@
               </a:ln>
               <a:extLst>
                 <a:ext uri="{91240B29-F687-4f45-9708-019B960494DF}">
-                  <a14:hiddenLine xmlns:a14="http://schemas.microsoft.com/office/drawing/2010/main" xmlns="" w="9525">
+                  <a14:hiddenLine xmlns="" xmlns:a14="http://schemas.microsoft.com/office/drawing/2010/main" w="9525">
                     <a:solidFill>
                       <a:srgbClr val="000000"/>
                     </a:solidFill>
@@ -12125,7 +12130,7 @@
               </a:ln>
               <a:extLst>
                 <a:ext uri="{91240B29-F687-4f45-9708-019B960494DF}">
-                  <a14:hiddenLine xmlns:a14="http://schemas.microsoft.com/office/drawing/2010/main" xmlns="" w="9525">
+                  <a14:hiddenLine xmlns="" xmlns:a14="http://schemas.microsoft.com/office/drawing/2010/main" w="9525">
                     <a:solidFill>
                       <a:srgbClr val="000000"/>
                     </a:solidFill>
@@ -12222,7 +12227,7 @@
               </a:ln>
               <a:extLst>
                 <a:ext uri="{91240B29-F687-4f45-9708-019B960494DF}">
-                  <a14:hiddenLine xmlns:a14="http://schemas.microsoft.com/office/drawing/2010/main" xmlns="" w="9525">
+                  <a14:hiddenLine xmlns="" xmlns:a14="http://schemas.microsoft.com/office/drawing/2010/main" w="9525">
                     <a:solidFill>
                       <a:srgbClr val="000000"/>
                     </a:solidFill>
@@ -12297,7 +12302,7 @@
               </a:ln>
               <a:extLst>
                 <a:ext uri="{91240B29-F687-4f45-9708-019B960494DF}">
-                  <a14:hiddenLine xmlns:a14="http://schemas.microsoft.com/office/drawing/2010/main" xmlns="" w="9525">
+                  <a14:hiddenLine xmlns="" xmlns:a14="http://schemas.microsoft.com/office/drawing/2010/main" w="9525">
                     <a:solidFill>
                       <a:srgbClr val="000000"/>
                     </a:solidFill>
@@ -12394,7 +12399,7 @@
               </a:ln>
               <a:extLst>
                 <a:ext uri="{91240B29-F687-4f45-9708-019B960494DF}">
-                  <a14:hiddenLine xmlns:a14="http://schemas.microsoft.com/office/drawing/2010/main" xmlns="" w="9525">
+                  <a14:hiddenLine xmlns="" xmlns:a14="http://schemas.microsoft.com/office/drawing/2010/main" w="9525">
                     <a:solidFill>
                       <a:srgbClr val="000000"/>
                     </a:solidFill>
@@ -12435,7 +12440,7 @@
               </a:ln>
               <a:extLst>
                 <a:ext uri="{91240B29-F687-4f45-9708-019B960494DF}">
-                  <a14:hiddenLine xmlns:a14="http://schemas.microsoft.com/office/drawing/2010/main" xmlns="" w="9525">
+                  <a14:hiddenLine xmlns="" xmlns:a14="http://schemas.microsoft.com/office/drawing/2010/main" w="9525">
                     <a:solidFill>
                       <a:srgbClr val="000000"/>
                     </a:solidFill>
@@ -12583,7 +12588,7 @@
             <a:fld id="{48A87A34-81AB-432B-8DAE-1953F412C126}" type="datetimeFigureOut">
               <a:rPr lang="en-US" dirty="0"/>
               <a:pPr/>
-              <a:t>7/26/2026</a:t>
+              <a:t>7/28/2026</a:t>
             </a:fld>
             <a:endParaRPr lang="en-US" dirty="0"/>
           </a:p>
@@ -13461,7 +13466,7 @@
           <a:noFill/>
           <a:extLst>
             <a:ext uri="{909E8E84-426E-40dd-AFC4-6F175D3DCCD1}">
-              <a14:hiddenFill xmlns="" xmlns:a16="http://schemas.microsoft.com/office/drawing/2014/main" xmlns:p14="http://schemas.microsoft.com/office/powerpoint/2010/main" xmlns:a14="http://schemas.microsoft.com/office/drawing/2010/main">
+              <a14:hiddenFill xmlns:a14="http://schemas.microsoft.com/office/drawing/2010/main" xmlns:p14="http://schemas.microsoft.com/office/powerpoint/2010/main" xmlns:a16="http://schemas.microsoft.com/office/drawing/2014/main" xmlns="">
                 <a:solidFill>
                   <a:srgbClr val="FFFFFF"/>
                 </a:solidFill>
@@ -13705,7 +13710,7 @@
             </a:ln>
             <a:extLst>
               <a:ext uri="{91240B29-F687-4f45-9708-019B960494DF}">
-                <a14:hiddenLine xmlns="" xmlns:a16="http://schemas.microsoft.com/office/drawing/2014/main" xmlns:p14="http://schemas.microsoft.com/office/powerpoint/2010/main" xmlns:a14="http://schemas.microsoft.com/office/drawing/2010/main" w="9525">
+                <a14:hiddenLine xmlns:a14="http://schemas.microsoft.com/office/drawing/2010/main" xmlns:p14="http://schemas.microsoft.com/office/powerpoint/2010/main" xmlns:a16="http://schemas.microsoft.com/office/drawing/2014/main" xmlns="" w="9525">
                   <a:solidFill>
                     <a:srgbClr val="000000"/>
                   </a:solidFill>
@@ -13817,7 +13822,7 @@
             </a:ln>
             <a:extLst>
               <a:ext uri="{91240B29-F687-4f45-9708-019B960494DF}">
-                <a14:hiddenLine xmlns="" xmlns:a16="http://schemas.microsoft.com/office/drawing/2014/main" xmlns:p14="http://schemas.microsoft.com/office/powerpoint/2010/main" xmlns:a14="http://schemas.microsoft.com/office/drawing/2010/main" w="9525">
+                <a14:hiddenLine xmlns:a14="http://schemas.microsoft.com/office/drawing/2010/main" xmlns:p14="http://schemas.microsoft.com/office/powerpoint/2010/main" xmlns:a16="http://schemas.microsoft.com/office/drawing/2014/main" xmlns="" w="9525">
                   <a:solidFill>
                     <a:srgbClr val="000000"/>
                   </a:solidFill>
@@ -13929,7 +13934,7 @@
             </a:ln>
             <a:extLst>
               <a:ext uri="{91240B29-F687-4f45-9708-019B960494DF}">
-                <a14:hiddenLine xmlns="" xmlns:a16="http://schemas.microsoft.com/office/drawing/2014/main" xmlns:p14="http://schemas.microsoft.com/office/powerpoint/2010/main" xmlns:a14="http://schemas.microsoft.com/office/drawing/2010/main" w="9525">
+                <a14:hiddenLine xmlns:a14="http://schemas.microsoft.com/office/drawing/2010/main" xmlns:p14="http://schemas.microsoft.com/office/powerpoint/2010/main" xmlns:a16="http://schemas.microsoft.com/office/drawing/2014/main" xmlns="" w="9525">
                   <a:solidFill>
                     <a:srgbClr val="000000"/>
                   </a:solidFill>
@@ -14013,7 +14018,7 @@
             </a:ln>
             <a:extLst>
               <a:ext uri="{91240B29-F687-4f45-9708-019B960494DF}">
-                <a14:hiddenLine xmlns="" xmlns:a16="http://schemas.microsoft.com/office/drawing/2014/main" xmlns:p14="http://schemas.microsoft.com/office/powerpoint/2010/main" xmlns:a14="http://schemas.microsoft.com/office/drawing/2010/main" w="9525">
+                <a14:hiddenLine xmlns:a14="http://schemas.microsoft.com/office/drawing/2010/main" xmlns:p14="http://schemas.microsoft.com/office/powerpoint/2010/main" xmlns:a16="http://schemas.microsoft.com/office/drawing/2014/main" xmlns="" w="9525">
                   <a:solidFill>
                     <a:srgbClr val="000000"/>
                   </a:solidFill>
@@ -14125,7 +14130,7 @@
             </a:ln>
             <a:extLst>
               <a:ext uri="{91240B29-F687-4f45-9708-019B960494DF}">
-                <a14:hiddenLine xmlns="" xmlns:a16="http://schemas.microsoft.com/office/drawing/2014/main" xmlns:p14="http://schemas.microsoft.com/office/powerpoint/2010/main" xmlns:a14="http://schemas.microsoft.com/office/drawing/2010/main" w="9525">
+                <a14:hiddenLine xmlns:a14="http://schemas.microsoft.com/office/drawing/2010/main" xmlns:p14="http://schemas.microsoft.com/office/powerpoint/2010/main" xmlns:a16="http://schemas.microsoft.com/office/drawing/2014/main" xmlns="" w="9525">
                   <a:solidFill>
                     <a:srgbClr val="000000"/>
                   </a:solidFill>
@@ -14209,7 +14214,7 @@
             </a:ln>
             <a:extLst>
               <a:ext uri="{91240B29-F687-4f45-9708-019B960494DF}">
-                <a14:hiddenLine xmlns="" xmlns:a16="http://schemas.microsoft.com/office/drawing/2014/main" xmlns:p14="http://schemas.microsoft.com/office/powerpoint/2010/main" xmlns:a14="http://schemas.microsoft.com/office/drawing/2010/main" w="9525">
+                <a14:hiddenLine xmlns:a14="http://schemas.microsoft.com/office/drawing/2010/main" xmlns:p14="http://schemas.microsoft.com/office/powerpoint/2010/main" xmlns:a16="http://schemas.microsoft.com/office/drawing/2014/main" xmlns="" w="9525">
                   <a:solidFill>
                     <a:srgbClr val="000000"/>
                   </a:solidFill>
@@ -14293,7 +14298,7 @@
             </a:ln>
             <a:extLst>
               <a:ext uri="{91240B29-F687-4f45-9708-019B960494DF}">
-                <a14:hiddenLine xmlns="" xmlns:a16="http://schemas.microsoft.com/office/drawing/2014/main" xmlns:p14="http://schemas.microsoft.com/office/powerpoint/2010/main" xmlns:a14="http://schemas.microsoft.com/office/drawing/2010/main" w="9525">
+                <a14:hiddenLine xmlns:a14="http://schemas.microsoft.com/office/drawing/2010/main" xmlns:p14="http://schemas.microsoft.com/office/powerpoint/2010/main" xmlns:a16="http://schemas.microsoft.com/office/drawing/2014/main" xmlns="" w="9525">
                   <a:solidFill>
                     <a:srgbClr val="000000"/>
                   </a:solidFill>
@@ -14405,7 +14410,7 @@
             </a:ln>
             <a:extLst>
               <a:ext uri="{91240B29-F687-4f45-9708-019B960494DF}">
-                <a14:hiddenLine xmlns="" xmlns:a16="http://schemas.microsoft.com/office/drawing/2014/main" xmlns:p14="http://schemas.microsoft.com/office/powerpoint/2010/main" xmlns:a14="http://schemas.microsoft.com/office/drawing/2010/main" w="9525">
+                <a14:hiddenLine xmlns:a14="http://schemas.microsoft.com/office/drawing/2010/main" xmlns:p14="http://schemas.microsoft.com/office/powerpoint/2010/main" xmlns:a16="http://schemas.microsoft.com/office/drawing/2014/main" xmlns="" w="9525">
                   <a:solidFill>
                     <a:srgbClr val="000000"/>
                   </a:solidFill>
@@ -14517,7 +14522,7 @@
             </a:ln>
             <a:extLst>
               <a:ext uri="{91240B29-F687-4f45-9708-019B960494DF}">
-                <a14:hiddenLine xmlns="" xmlns:a16="http://schemas.microsoft.com/office/drawing/2014/main" xmlns:p14="http://schemas.microsoft.com/office/powerpoint/2010/main" xmlns:a14="http://schemas.microsoft.com/office/drawing/2010/main" w="9525">
+                <a14:hiddenLine xmlns:a14="http://schemas.microsoft.com/office/drawing/2010/main" xmlns:p14="http://schemas.microsoft.com/office/powerpoint/2010/main" xmlns:a16="http://schemas.microsoft.com/office/drawing/2014/main" xmlns="" w="9525">
                   <a:solidFill>
                     <a:srgbClr val="000000"/>
                   </a:solidFill>
@@ -14601,7 +14606,7 @@
             </a:ln>
             <a:extLst>
               <a:ext uri="{91240B29-F687-4f45-9708-019B960494DF}">
-                <a14:hiddenLine xmlns="" xmlns:a16="http://schemas.microsoft.com/office/drawing/2014/main" xmlns:p14="http://schemas.microsoft.com/office/powerpoint/2010/main" xmlns:a14="http://schemas.microsoft.com/office/drawing/2010/main" w="9525">
+                <a14:hiddenLine xmlns:a14="http://schemas.microsoft.com/office/drawing/2010/main" xmlns:p14="http://schemas.microsoft.com/office/powerpoint/2010/main" xmlns:a16="http://schemas.microsoft.com/office/drawing/2014/main" xmlns="" w="9525">
                   <a:solidFill>
                     <a:srgbClr val="000000"/>
                   </a:solidFill>
@@ -14733,7 +14738,7 @@
             </a:ln>
             <a:extLst>
               <a:ext uri="{91240B29-F687-4f45-9708-019B960494DF}">
-                <a14:hiddenLine xmlns="" xmlns:a16="http://schemas.microsoft.com/office/drawing/2014/main" xmlns:p14="http://schemas.microsoft.com/office/powerpoint/2010/main" xmlns:a14="http://schemas.microsoft.com/office/drawing/2010/main" w="9525">
+                <a14:hiddenLine xmlns:a14="http://schemas.microsoft.com/office/drawing/2010/main" xmlns:p14="http://schemas.microsoft.com/office/powerpoint/2010/main" xmlns:a16="http://schemas.microsoft.com/office/drawing/2014/main" xmlns="" w="9525">
                   <a:solidFill>
                     <a:srgbClr val="000000"/>
                   </a:solidFill>
@@ -14861,7 +14866,7 @@
             </a:ln>
             <a:extLst>
               <a:ext uri="{91240B29-F687-4f45-9708-019B960494DF}">
-                <a14:hiddenLine xmlns="" xmlns:a16="http://schemas.microsoft.com/office/drawing/2014/main" xmlns:p14="http://schemas.microsoft.com/office/powerpoint/2010/main" xmlns:a14="http://schemas.microsoft.com/office/drawing/2010/main" w="9525">
+                <a14:hiddenLine xmlns:a14="http://schemas.microsoft.com/office/drawing/2010/main" xmlns:p14="http://schemas.microsoft.com/office/powerpoint/2010/main" xmlns:a16="http://schemas.microsoft.com/office/drawing/2014/main" xmlns="" w="9525">
                   <a:solidFill>
                     <a:srgbClr val="000000"/>
                   </a:solidFill>
@@ -14945,7 +14950,7 @@
             </a:ln>
             <a:extLst>
               <a:ext uri="{91240B29-F687-4f45-9708-019B960494DF}">
-                <a14:hiddenLine xmlns="" xmlns:a16="http://schemas.microsoft.com/office/drawing/2014/main" xmlns:p14="http://schemas.microsoft.com/office/powerpoint/2010/main" xmlns:a14="http://schemas.microsoft.com/office/drawing/2010/main" w="9525">
+                <a14:hiddenLine xmlns:a14="http://schemas.microsoft.com/office/drawing/2010/main" xmlns:p14="http://schemas.microsoft.com/office/powerpoint/2010/main" xmlns:a16="http://schemas.microsoft.com/office/drawing/2014/main" xmlns="" w="9525">
                   <a:solidFill>
                     <a:srgbClr val="000000"/>
                   </a:solidFill>
@@ -15029,7 +15034,7 @@
             </a:ln>
             <a:extLst>
               <a:ext uri="{91240B29-F687-4f45-9708-019B960494DF}">
-                <a14:hiddenLine xmlns="" xmlns:a16="http://schemas.microsoft.com/office/drawing/2014/main" xmlns:p14="http://schemas.microsoft.com/office/powerpoint/2010/main" xmlns:a14="http://schemas.microsoft.com/office/drawing/2010/main" w="9525">
+                <a14:hiddenLine xmlns:a14="http://schemas.microsoft.com/office/drawing/2010/main" xmlns:p14="http://schemas.microsoft.com/office/powerpoint/2010/main" xmlns:a16="http://schemas.microsoft.com/office/drawing/2014/main" xmlns="" w="9525">
                   <a:solidFill>
                     <a:srgbClr val="000000"/>
                   </a:solidFill>
@@ -15141,7 +15146,7 @@
             </a:ln>
             <a:extLst>
               <a:ext uri="{91240B29-F687-4f45-9708-019B960494DF}">
-                <a14:hiddenLine xmlns="" xmlns:a16="http://schemas.microsoft.com/office/drawing/2014/main" xmlns:p14="http://schemas.microsoft.com/office/powerpoint/2010/main" xmlns:a14="http://schemas.microsoft.com/office/drawing/2010/main" w="9525">
+                <a14:hiddenLine xmlns:a14="http://schemas.microsoft.com/office/drawing/2010/main" xmlns:p14="http://schemas.microsoft.com/office/powerpoint/2010/main" xmlns:a16="http://schemas.microsoft.com/office/drawing/2014/main" xmlns="" w="9525">
                   <a:solidFill>
                     <a:srgbClr val="000000"/>
                   </a:solidFill>
@@ -15197,7 +15202,7 @@
             </a:ln>
             <a:extLst>
               <a:ext uri="{91240B29-F687-4f45-9708-019B960494DF}">
-                <a14:hiddenLine xmlns="" xmlns:a16="http://schemas.microsoft.com/office/drawing/2014/main" xmlns:p14="http://schemas.microsoft.com/office/powerpoint/2010/main" xmlns:a14="http://schemas.microsoft.com/office/drawing/2010/main" w="9525">
+                <a14:hiddenLine xmlns:a14="http://schemas.microsoft.com/office/drawing/2010/main" xmlns:p14="http://schemas.microsoft.com/office/powerpoint/2010/main" xmlns:a16="http://schemas.microsoft.com/office/drawing/2014/main" xmlns="" w="9525">
                   <a:solidFill>
                     <a:srgbClr val="000000"/>
                   </a:solidFill>
@@ -15284,7 +15289,7 @@
             </a:ln>
             <a:extLst>
               <a:ext uri="{91240B29-F687-4f45-9708-019B960494DF}">
-                <a14:hiddenLine xmlns="" xmlns:a16="http://schemas.microsoft.com/office/drawing/2014/main" xmlns:p14="http://schemas.microsoft.com/office/powerpoint/2010/main" xmlns:a14="http://schemas.microsoft.com/office/drawing/2010/main" w="9525">
+                <a14:hiddenLine xmlns:a14="http://schemas.microsoft.com/office/drawing/2010/main" xmlns:p14="http://schemas.microsoft.com/office/powerpoint/2010/main" xmlns:a16="http://schemas.microsoft.com/office/drawing/2014/main" xmlns="" w="9525">
                   <a:solidFill>
                     <a:srgbClr val="000000"/>
                   </a:solidFill>
@@ -15396,7 +15401,7 @@
             </a:ln>
             <a:extLst>
               <a:ext uri="{91240B29-F687-4f45-9708-019B960494DF}">
-                <a14:hiddenLine xmlns="" xmlns:a16="http://schemas.microsoft.com/office/drawing/2014/main" xmlns:p14="http://schemas.microsoft.com/office/powerpoint/2010/main" xmlns:a14="http://schemas.microsoft.com/office/drawing/2010/main" w="9525">
+                <a14:hiddenLine xmlns:a14="http://schemas.microsoft.com/office/drawing/2010/main" xmlns:p14="http://schemas.microsoft.com/office/powerpoint/2010/main" xmlns:a16="http://schemas.microsoft.com/office/drawing/2014/main" xmlns="" w="9525">
                   <a:solidFill>
                     <a:srgbClr val="000000"/>
                   </a:solidFill>
@@ -15480,7 +15485,7 @@
             </a:ln>
             <a:extLst>
               <a:ext uri="{91240B29-F687-4f45-9708-019B960494DF}">
-                <a14:hiddenLine xmlns="" xmlns:a16="http://schemas.microsoft.com/office/drawing/2014/main" xmlns:p14="http://schemas.microsoft.com/office/powerpoint/2010/main" xmlns:a14="http://schemas.microsoft.com/office/drawing/2010/main" w="9525">
+                <a14:hiddenLine xmlns:a14="http://schemas.microsoft.com/office/drawing/2010/main" xmlns:p14="http://schemas.microsoft.com/office/powerpoint/2010/main" xmlns:a16="http://schemas.microsoft.com/office/drawing/2014/main" xmlns="" w="9525">
                   <a:solidFill>
                     <a:srgbClr val="000000"/>
                   </a:solidFill>
@@ -15592,7 +15597,7 @@
             </a:ln>
             <a:extLst>
               <a:ext uri="{91240B29-F687-4f45-9708-019B960494DF}">
-                <a14:hiddenLine xmlns="" xmlns:a16="http://schemas.microsoft.com/office/drawing/2014/main" xmlns:p14="http://schemas.microsoft.com/office/powerpoint/2010/main" xmlns:a14="http://schemas.microsoft.com/office/drawing/2010/main" w="9525">
+                <a14:hiddenLine xmlns:a14="http://schemas.microsoft.com/office/drawing/2010/main" xmlns:p14="http://schemas.microsoft.com/office/powerpoint/2010/main" xmlns:a16="http://schemas.microsoft.com/office/drawing/2014/main" xmlns="" w="9525">
                   <a:solidFill>
                     <a:srgbClr val="000000"/>
                   </a:solidFill>
@@ -15679,7 +15684,7 @@
             </a:ln>
             <a:extLst>
               <a:ext uri="{91240B29-F687-4f45-9708-019B960494DF}">
-                <a14:hiddenLine xmlns="" xmlns:a16="http://schemas.microsoft.com/office/drawing/2014/main" xmlns:p14="http://schemas.microsoft.com/office/powerpoint/2010/main" xmlns:a14="http://schemas.microsoft.com/office/drawing/2010/main" w="9525">
+                <a14:hiddenLine xmlns:a14="http://schemas.microsoft.com/office/drawing/2010/main" xmlns:p14="http://schemas.microsoft.com/office/powerpoint/2010/main" xmlns:a16="http://schemas.microsoft.com/office/drawing/2014/main" xmlns="" w="9525">
                   <a:solidFill>
                     <a:srgbClr val="000000"/>
                   </a:solidFill>
@@ -15763,7 +15768,7 @@
             </a:ln>
             <a:extLst>
               <a:ext uri="{91240B29-F687-4f45-9708-019B960494DF}">
-                <a14:hiddenLine xmlns="" xmlns:a16="http://schemas.microsoft.com/office/drawing/2014/main" xmlns:p14="http://schemas.microsoft.com/office/powerpoint/2010/main" xmlns:a14="http://schemas.microsoft.com/office/drawing/2010/main" w="9525">
+                <a14:hiddenLine xmlns:a14="http://schemas.microsoft.com/office/drawing/2010/main" xmlns:p14="http://schemas.microsoft.com/office/powerpoint/2010/main" xmlns:a16="http://schemas.microsoft.com/office/drawing/2014/main" xmlns="" w="9525">
                   <a:solidFill>
                     <a:srgbClr val="000000"/>
                   </a:solidFill>
@@ -15875,7 +15880,7 @@
             </a:ln>
             <a:extLst>
               <a:ext uri="{91240B29-F687-4f45-9708-019B960494DF}">
-                <a14:hiddenLine xmlns="" xmlns:a16="http://schemas.microsoft.com/office/drawing/2014/main" xmlns:p14="http://schemas.microsoft.com/office/powerpoint/2010/main" xmlns:a14="http://schemas.microsoft.com/office/drawing/2010/main" w="9525">
+                <a14:hiddenLine xmlns:a14="http://schemas.microsoft.com/office/drawing/2010/main" xmlns:p14="http://schemas.microsoft.com/office/powerpoint/2010/main" xmlns:a16="http://schemas.microsoft.com/office/drawing/2014/main" xmlns="" w="9525">
                   <a:solidFill>
                     <a:srgbClr val="000000"/>
                   </a:solidFill>
@@ -15987,7 +15992,7 @@
             </a:ln>
             <a:extLst>
               <a:ext uri="{91240B29-F687-4f45-9708-019B960494DF}">
-                <a14:hiddenLine xmlns="" xmlns:a16="http://schemas.microsoft.com/office/drawing/2014/main" xmlns:p14="http://schemas.microsoft.com/office/powerpoint/2010/main" xmlns:a14="http://schemas.microsoft.com/office/drawing/2010/main" w="9525">
+                <a14:hiddenLine xmlns:a14="http://schemas.microsoft.com/office/drawing/2010/main" xmlns:p14="http://schemas.microsoft.com/office/powerpoint/2010/main" xmlns:a16="http://schemas.microsoft.com/office/drawing/2014/main" xmlns="" w="9525">
                   <a:solidFill>
                     <a:srgbClr val="000000"/>
                   </a:solidFill>
@@ -16074,7 +16079,7 @@
             </a:ln>
             <a:extLst>
               <a:ext uri="{91240B29-F687-4f45-9708-019B960494DF}">
-                <a14:hiddenLine xmlns="" xmlns:a16="http://schemas.microsoft.com/office/drawing/2014/main" xmlns:p14="http://schemas.microsoft.com/office/powerpoint/2010/main" xmlns:a14="http://schemas.microsoft.com/office/drawing/2010/main" w="9525">
+                <a14:hiddenLine xmlns:a14="http://schemas.microsoft.com/office/drawing/2010/main" xmlns:p14="http://schemas.microsoft.com/office/powerpoint/2010/main" xmlns:a16="http://schemas.microsoft.com/office/drawing/2014/main" xmlns="" w="9525">
                   <a:solidFill>
                     <a:srgbClr val="000000"/>
                   </a:solidFill>
@@ -16216,7 +16221,7 @@
             </a:ln>
             <a:extLst>
               <a:ext uri="{91240B29-F687-4f45-9708-019B960494DF}">
-                <a14:hiddenLine xmlns="" xmlns:a16="http://schemas.microsoft.com/office/drawing/2014/main" xmlns:p14="http://schemas.microsoft.com/office/powerpoint/2010/main" xmlns:a14="http://schemas.microsoft.com/office/drawing/2010/main" w="9525">
+                <a14:hiddenLine xmlns:a14="http://schemas.microsoft.com/office/drawing/2010/main" xmlns:p14="http://schemas.microsoft.com/office/powerpoint/2010/main" xmlns:a16="http://schemas.microsoft.com/office/drawing/2014/main" xmlns="" w="9525">
                   <a:solidFill>
                     <a:srgbClr val="000000"/>
                   </a:solidFill>
@@ -16513,7 +16518,7 @@
           <a:p>
             <a:r>
               <a:rPr lang="pt-PT" dirty="0"/>
-              <a:t>Resultado operacional</a:t>
+              <a:t>Resultado principal: cobertura</a:t>
             </a:r>
           </a:p>
         </p:txBody>
@@ -16625,7 +16630,7 @@
           <a:p>
             <a:r>
               <a:rPr lang="pt-PT" dirty="0"/>
-              <a:t>Resultado operacional</a:t>
+              <a:t>Resultado principal: cobertura</a:t>
             </a:r>
           </a:p>
         </p:txBody>
@@ -16715,7 +16720,7 @@
           <a:p>
             <a:r>
               <a:rPr lang="pt-PT" dirty="0"/>
-              <a:t>Tokens e custo mensurável</a:t>
+              <a:t>Tokens e custo operacional</a:t>
             </a:r>
           </a:p>
         </p:txBody>
@@ -16912,9 +16917,10 @@
           <a:lstStyle/>
           <a:p>
             <a:r>
-              <a:rPr lang="pt-PT" dirty="0"/>
-              <a:t>Conclusão</a:t>
+              <a:rPr lang="pt-PT"/>
+              <a:t>Conclusão e limites</a:t>
             </a:r>
+            <a:endParaRPr lang="pt-PT" dirty="0"/>
           </a:p>
         </p:txBody>
       </p:sp>
@@ -17140,7 +17146,7 @@
             </a:ln>
             <a:extLst>
               <a:ext uri="{91240B29-F687-4f45-9708-019B960494DF}">
-                <a14:hiddenLine xmlns="" xmlns:a16="http://schemas.microsoft.com/office/drawing/2014/main" xmlns:p14="http://schemas.microsoft.com/office/powerpoint/2010/main" xmlns:a14="http://schemas.microsoft.com/office/drawing/2010/main" w="9525">
+                <a14:hiddenLine xmlns:a14="http://schemas.microsoft.com/office/drawing/2010/main" xmlns:p14="http://schemas.microsoft.com/office/powerpoint/2010/main" xmlns:a16="http://schemas.microsoft.com/office/drawing/2014/main" xmlns="" w="9525">
                   <a:solidFill>
                     <a:srgbClr val="000000"/>
                   </a:solidFill>
@@ -17252,7 +17258,7 @@
             </a:ln>
             <a:extLst>
               <a:ext uri="{91240B29-F687-4f45-9708-019B960494DF}">
-                <a14:hiddenLine xmlns="" xmlns:a16="http://schemas.microsoft.com/office/drawing/2014/main" xmlns:p14="http://schemas.microsoft.com/office/powerpoint/2010/main" xmlns:a14="http://schemas.microsoft.com/office/drawing/2010/main" w="9525">
+                <a14:hiddenLine xmlns:a14="http://schemas.microsoft.com/office/drawing/2010/main" xmlns:p14="http://schemas.microsoft.com/office/powerpoint/2010/main" xmlns:a16="http://schemas.microsoft.com/office/drawing/2014/main" xmlns="" w="9525">
                   <a:solidFill>
                     <a:srgbClr val="000000"/>
                   </a:solidFill>
@@ -17364,7 +17370,7 @@
             </a:ln>
             <a:extLst>
               <a:ext uri="{91240B29-F687-4f45-9708-019B960494DF}">
-                <a14:hiddenLine xmlns="" xmlns:a16="http://schemas.microsoft.com/office/drawing/2014/main" xmlns:p14="http://schemas.microsoft.com/office/powerpoint/2010/main" xmlns:a14="http://schemas.microsoft.com/office/drawing/2010/main" w="9525">
+                <a14:hiddenLine xmlns:a14="http://schemas.microsoft.com/office/drawing/2010/main" xmlns:p14="http://schemas.microsoft.com/office/powerpoint/2010/main" xmlns:a16="http://schemas.microsoft.com/office/drawing/2014/main" xmlns="" w="9525">
                   <a:solidFill>
                     <a:srgbClr val="000000"/>
                   </a:solidFill>
@@ -17448,7 +17454,7 @@
             </a:ln>
             <a:extLst>
               <a:ext uri="{91240B29-F687-4f45-9708-019B960494DF}">
-                <a14:hiddenLine xmlns="" xmlns:a16="http://schemas.microsoft.com/office/drawing/2014/main" xmlns:p14="http://schemas.microsoft.com/office/powerpoint/2010/main" xmlns:a14="http://schemas.microsoft.com/office/drawing/2010/main" w="9525">
+                <a14:hiddenLine xmlns:a14="http://schemas.microsoft.com/office/drawing/2010/main" xmlns:p14="http://schemas.microsoft.com/office/powerpoint/2010/main" xmlns:a16="http://schemas.microsoft.com/office/drawing/2014/main" xmlns="" w="9525">
                   <a:solidFill>
                     <a:srgbClr val="000000"/>
                   </a:solidFill>
@@ -17560,7 +17566,7 @@
             </a:ln>
             <a:extLst>
               <a:ext uri="{91240B29-F687-4f45-9708-019B960494DF}">
-                <a14:hiddenLine xmlns="" xmlns:a16="http://schemas.microsoft.com/office/drawing/2014/main" xmlns:p14="http://schemas.microsoft.com/office/powerpoint/2010/main" xmlns:a14="http://schemas.microsoft.com/office/drawing/2010/main" w="9525">
+                <a14:hiddenLine xmlns:a14="http://schemas.microsoft.com/office/drawing/2010/main" xmlns:p14="http://schemas.microsoft.com/office/powerpoint/2010/main" xmlns:a16="http://schemas.microsoft.com/office/drawing/2014/main" xmlns="" w="9525">
                   <a:solidFill>
                     <a:srgbClr val="000000"/>
                   </a:solidFill>
@@ -17644,7 +17650,7 @@
             </a:ln>
             <a:extLst>
               <a:ext uri="{91240B29-F687-4f45-9708-019B960494DF}">
-                <a14:hiddenLine xmlns="" xmlns:a16="http://schemas.microsoft.com/office/drawing/2014/main" xmlns:p14="http://schemas.microsoft.com/office/powerpoint/2010/main" xmlns:a14="http://schemas.microsoft.com/office/drawing/2010/main" w="9525">
+                <a14:hiddenLine xmlns:a14="http://schemas.microsoft.com/office/drawing/2010/main" xmlns:p14="http://schemas.microsoft.com/office/powerpoint/2010/main" xmlns:a16="http://schemas.microsoft.com/office/drawing/2014/main" xmlns="" w="9525">
                   <a:solidFill>
                     <a:srgbClr val="000000"/>
                   </a:solidFill>
@@ -17728,7 +17734,7 @@
             </a:ln>
             <a:extLst>
               <a:ext uri="{91240B29-F687-4f45-9708-019B960494DF}">
-                <a14:hiddenLine xmlns="" xmlns:a16="http://schemas.microsoft.com/office/drawing/2014/main" xmlns:p14="http://schemas.microsoft.com/office/powerpoint/2010/main" xmlns:a14="http://schemas.microsoft.com/office/drawing/2010/main" w="9525">
+                <a14:hiddenLine xmlns:a14="http://schemas.microsoft.com/office/drawing/2010/main" xmlns:p14="http://schemas.microsoft.com/office/powerpoint/2010/main" xmlns:a16="http://schemas.microsoft.com/office/drawing/2014/main" xmlns="" w="9525">
                   <a:solidFill>
                     <a:srgbClr val="000000"/>
                   </a:solidFill>
@@ -17840,7 +17846,7 @@
             </a:ln>
             <a:extLst>
               <a:ext uri="{91240B29-F687-4f45-9708-019B960494DF}">
-                <a14:hiddenLine xmlns="" xmlns:a16="http://schemas.microsoft.com/office/drawing/2014/main" xmlns:p14="http://schemas.microsoft.com/office/powerpoint/2010/main" xmlns:a14="http://schemas.microsoft.com/office/drawing/2010/main" w="9525">
+                <a14:hiddenLine xmlns:a14="http://schemas.microsoft.com/office/drawing/2010/main" xmlns:p14="http://schemas.microsoft.com/office/powerpoint/2010/main" xmlns:a16="http://schemas.microsoft.com/office/drawing/2014/main" xmlns="" w="9525">
                   <a:solidFill>
                     <a:srgbClr val="000000"/>
                   </a:solidFill>
@@ -17952,7 +17958,7 @@
             </a:ln>
             <a:extLst>
               <a:ext uri="{91240B29-F687-4f45-9708-019B960494DF}">
-                <a14:hiddenLine xmlns="" xmlns:a16="http://schemas.microsoft.com/office/drawing/2014/main" xmlns:p14="http://schemas.microsoft.com/office/powerpoint/2010/main" xmlns:a14="http://schemas.microsoft.com/office/drawing/2010/main" w="9525">
+                <a14:hiddenLine xmlns:a14="http://schemas.microsoft.com/office/drawing/2010/main" xmlns:p14="http://schemas.microsoft.com/office/powerpoint/2010/main" xmlns:a16="http://schemas.microsoft.com/office/drawing/2014/main" xmlns="" w="9525">
                   <a:solidFill>
                     <a:srgbClr val="000000"/>
                   </a:solidFill>
@@ -18036,7 +18042,7 @@
             </a:ln>
             <a:extLst>
               <a:ext uri="{91240B29-F687-4f45-9708-019B960494DF}">
-                <a14:hiddenLine xmlns="" xmlns:a16="http://schemas.microsoft.com/office/drawing/2014/main" xmlns:p14="http://schemas.microsoft.com/office/powerpoint/2010/main" xmlns:a14="http://schemas.microsoft.com/office/drawing/2010/main" w="9525">
+                <a14:hiddenLine xmlns:a14="http://schemas.microsoft.com/office/drawing/2010/main" xmlns:p14="http://schemas.microsoft.com/office/powerpoint/2010/main" xmlns:a16="http://schemas.microsoft.com/office/drawing/2014/main" xmlns="" w="9525">
                   <a:solidFill>
                     <a:srgbClr val="000000"/>
                   </a:solidFill>
@@ -18168,7 +18174,7 @@
             </a:ln>
             <a:extLst>
               <a:ext uri="{91240B29-F687-4f45-9708-019B960494DF}">
-                <a14:hiddenLine xmlns="" xmlns:a16="http://schemas.microsoft.com/office/drawing/2014/main" xmlns:p14="http://schemas.microsoft.com/office/powerpoint/2010/main" xmlns:a14="http://schemas.microsoft.com/office/drawing/2010/main" w="9525">
+                <a14:hiddenLine xmlns:a14="http://schemas.microsoft.com/office/drawing/2010/main" xmlns:p14="http://schemas.microsoft.com/office/powerpoint/2010/main" xmlns:a16="http://schemas.microsoft.com/office/drawing/2014/main" xmlns="" w="9525">
                   <a:solidFill>
                     <a:srgbClr val="000000"/>
                   </a:solidFill>
@@ -18296,7 +18302,7 @@
             </a:ln>
             <a:extLst>
               <a:ext uri="{91240B29-F687-4f45-9708-019B960494DF}">
-                <a14:hiddenLine xmlns="" xmlns:a16="http://schemas.microsoft.com/office/drawing/2014/main" xmlns:p14="http://schemas.microsoft.com/office/powerpoint/2010/main" xmlns:a14="http://schemas.microsoft.com/office/drawing/2010/main" w="9525">
+                <a14:hiddenLine xmlns:a14="http://schemas.microsoft.com/office/drawing/2010/main" xmlns:p14="http://schemas.microsoft.com/office/powerpoint/2010/main" xmlns:a16="http://schemas.microsoft.com/office/drawing/2014/main" xmlns="" w="9525">
                   <a:solidFill>
                     <a:srgbClr val="000000"/>
                   </a:solidFill>
@@ -18380,7 +18386,7 @@
             </a:ln>
             <a:extLst>
               <a:ext uri="{91240B29-F687-4f45-9708-019B960494DF}">
-                <a14:hiddenLine xmlns="" xmlns:a16="http://schemas.microsoft.com/office/drawing/2014/main" xmlns:p14="http://schemas.microsoft.com/office/powerpoint/2010/main" xmlns:a14="http://schemas.microsoft.com/office/drawing/2010/main" w="9525">
+                <a14:hiddenLine xmlns:a14="http://schemas.microsoft.com/office/drawing/2010/main" xmlns:p14="http://schemas.microsoft.com/office/powerpoint/2010/main" xmlns:a16="http://schemas.microsoft.com/office/drawing/2014/main" xmlns="" w="9525">
                   <a:solidFill>
                     <a:srgbClr val="000000"/>
                   </a:solidFill>
@@ -18464,7 +18470,7 @@
             </a:ln>
             <a:extLst>
               <a:ext uri="{91240B29-F687-4f45-9708-019B960494DF}">
-                <a14:hiddenLine xmlns="" xmlns:a16="http://schemas.microsoft.com/office/drawing/2014/main" xmlns:p14="http://schemas.microsoft.com/office/powerpoint/2010/main" xmlns:a14="http://schemas.microsoft.com/office/drawing/2010/main" w="9525">
+                <a14:hiddenLine xmlns:a14="http://schemas.microsoft.com/office/drawing/2010/main" xmlns:p14="http://schemas.microsoft.com/office/powerpoint/2010/main" xmlns:a16="http://schemas.microsoft.com/office/drawing/2014/main" xmlns="" w="9525">
                   <a:solidFill>
                     <a:srgbClr val="000000"/>
                   </a:solidFill>
@@ -18576,7 +18582,7 @@
             </a:ln>
             <a:extLst>
               <a:ext uri="{91240B29-F687-4f45-9708-019B960494DF}">
-                <a14:hiddenLine xmlns="" xmlns:a16="http://schemas.microsoft.com/office/drawing/2014/main" xmlns:p14="http://schemas.microsoft.com/office/powerpoint/2010/main" xmlns:a14="http://schemas.microsoft.com/office/drawing/2010/main" w="9525">
+                <a14:hiddenLine xmlns:a14="http://schemas.microsoft.com/office/drawing/2010/main" xmlns:p14="http://schemas.microsoft.com/office/powerpoint/2010/main" xmlns:a16="http://schemas.microsoft.com/office/drawing/2014/main" xmlns="" w="9525">
                   <a:solidFill>
                     <a:srgbClr val="000000"/>
                   </a:solidFill>
@@ -18632,7 +18638,7 @@
             </a:ln>
             <a:extLst>
               <a:ext uri="{91240B29-F687-4f45-9708-019B960494DF}">
-                <a14:hiddenLine xmlns="" xmlns:a16="http://schemas.microsoft.com/office/drawing/2014/main" xmlns:p14="http://schemas.microsoft.com/office/powerpoint/2010/main" xmlns:a14="http://schemas.microsoft.com/office/drawing/2010/main" w="9525">
+                <a14:hiddenLine xmlns:a14="http://schemas.microsoft.com/office/drawing/2010/main" xmlns:p14="http://schemas.microsoft.com/office/powerpoint/2010/main" xmlns:a16="http://schemas.microsoft.com/office/drawing/2014/main" xmlns="" w="9525">
                   <a:solidFill>
                     <a:srgbClr val="000000"/>
                   </a:solidFill>
@@ -18719,7 +18725,7 @@
             </a:ln>
             <a:extLst>
               <a:ext uri="{91240B29-F687-4f45-9708-019B960494DF}">
-                <a14:hiddenLine xmlns="" xmlns:a16="http://schemas.microsoft.com/office/drawing/2014/main" xmlns:p14="http://schemas.microsoft.com/office/powerpoint/2010/main" xmlns:a14="http://schemas.microsoft.com/office/drawing/2010/main" w="9525">
+                <a14:hiddenLine xmlns:a14="http://schemas.microsoft.com/office/drawing/2010/main" xmlns:p14="http://schemas.microsoft.com/office/powerpoint/2010/main" xmlns:a16="http://schemas.microsoft.com/office/drawing/2014/main" xmlns="" w="9525">
                   <a:solidFill>
                     <a:srgbClr val="000000"/>
                   </a:solidFill>
@@ -18831,7 +18837,7 @@
             </a:ln>
             <a:extLst>
               <a:ext uri="{91240B29-F687-4f45-9708-019B960494DF}">
-                <a14:hiddenLine xmlns="" xmlns:a16="http://schemas.microsoft.com/office/drawing/2014/main" xmlns:p14="http://schemas.microsoft.com/office/powerpoint/2010/main" xmlns:a14="http://schemas.microsoft.com/office/drawing/2010/main" w="9525">
+                <a14:hiddenLine xmlns:a14="http://schemas.microsoft.com/office/drawing/2010/main" xmlns:p14="http://schemas.microsoft.com/office/powerpoint/2010/main" xmlns:a16="http://schemas.microsoft.com/office/drawing/2014/main" xmlns="" w="9525">
                   <a:solidFill>
                     <a:srgbClr val="000000"/>
                   </a:solidFill>
@@ -18915,7 +18921,7 @@
             </a:ln>
             <a:extLst>
               <a:ext uri="{91240B29-F687-4f45-9708-019B960494DF}">
-                <a14:hiddenLine xmlns="" xmlns:a16="http://schemas.microsoft.com/office/drawing/2014/main" xmlns:p14="http://schemas.microsoft.com/office/powerpoint/2010/main" xmlns:a14="http://schemas.microsoft.com/office/drawing/2010/main" w="9525">
+                <a14:hiddenLine xmlns:a14="http://schemas.microsoft.com/office/drawing/2010/main" xmlns:p14="http://schemas.microsoft.com/office/powerpoint/2010/main" xmlns:a16="http://schemas.microsoft.com/office/drawing/2014/main" xmlns="" w="9525">
                   <a:solidFill>
                     <a:srgbClr val="000000"/>
                   </a:solidFill>
@@ -19027,7 +19033,7 @@
             </a:ln>
             <a:extLst>
               <a:ext uri="{91240B29-F687-4f45-9708-019B960494DF}">
-                <a14:hiddenLine xmlns="" xmlns:a16="http://schemas.microsoft.com/office/drawing/2014/main" xmlns:p14="http://schemas.microsoft.com/office/powerpoint/2010/main" xmlns:a14="http://schemas.microsoft.com/office/drawing/2010/main" w="9525">
+                <a14:hiddenLine xmlns:a14="http://schemas.microsoft.com/office/drawing/2010/main" xmlns:p14="http://schemas.microsoft.com/office/powerpoint/2010/main" xmlns:a16="http://schemas.microsoft.com/office/drawing/2014/main" xmlns="" w="9525">
                   <a:solidFill>
                     <a:srgbClr val="000000"/>
                   </a:solidFill>
@@ -19114,7 +19120,7 @@
             </a:ln>
             <a:extLst>
               <a:ext uri="{91240B29-F687-4f45-9708-019B960494DF}">
-                <a14:hiddenLine xmlns="" xmlns:a16="http://schemas.microsoft.com/office/drawing/2014/main" xmlns:p14="http://schemas.microsoft.com/office/powerpoint/2010/main" xmlns:a14="http://schemas.microsoft.com/office/drawing/2010/main" w="9525">
+                <a14:hiddenLine xmlns:a14="http://schemas.microsoft.com/office/drawing/2010/main" xmlns:p14="http://schemas.microsoft.com/office/powerpoint/2010/main" xmlns:a16="http://schemas.microsoft.com/office/drawing/2014/main" xmlns="" w="9525">
                   <a:solidFill>
                     <a:srgbClr val="000000"/>
                   </a:solidFill>
@@ -19198,7 +19204,7 @@
             </a:ln>
             <a:extLst>
               <a:ext uri="{91240B29-F687-4f45-9708-019B960494DF}">
-                <a14:hiddenLine xmlns="" xmlns:a16="http://schemas.microsoft.com/office/drawing/2014/main" xmlns:p14="http://schemas.microsoft.com/office/powerpoint/2010/main" xmlns:a14="http://schemas.microsoft.com/office/drawing/2010/main" w="9525">
+                <a14:hiddenLine xmlns:a14="http://schemas.microsoft.com/office/drawing/2010/main" xmlns:p14="http://schemas.microsoft.com/office/powerpoint/2010/main" xmlns:a16="http://schemas.microsoft.com/office/drawing/2014/main" xmlns="" w="9525">
                   <a:solidFill>
                     <a:srgbClr val="000000"/>
                   </a:solidFill>
@@ -19310,7 +19316,7 @@
             </a:ln>
             <a:extLst>
               <a:ext uri="{91240B29-F687-4f45-9708-019B960494DF}">
-                <a14:hiddenLine xmlns="" xmlns:a16="http://schemas.microsoft.com/office/drawing/2014/main" xmlns:p14="http://schemas.microsoft.com/office/powerpoint/2010/main" xmlns:a14="http://schemas.microsoft.com/office/drawing/2010/main" w="9525">
+                <a14:hiddenLine xmlns:a14="http://schemas.microsoft.com/office/drawing/2010/main" xmlns:p14="http://schemas.microsoft.com/office/powerpoint/2010/main" xmlns:a16="http://schemas.microsoft.com/office/drawing/2014/main" xmlns="" w="9525">
                   <a:solidFill>
                     <a:srgbClr val="000000"/>
                   </a:solidFill>
@@ -19422,7 +19428,7 @@
             </a:ln>
             <a:extLst>
               <a:ext uri="{91240B29-F687-4f45-9708-019B960494DF}">
-                <a14:hiddenLine xmlns="" xmlns:a16="http://schemas.microsoft.com/office/drawing/2014/main" xmlns:p14="http://schemas.microsoft.com/office/powerpoint/2010/main" xmlns:a14="http://schemas.microsoft.com/office/drawing/2010/main" w="9525">
+                <a14:hiddenLine xmlns:a14="http://schemas.microsoft.com/office/drawing/2010/main" xmlns:p14="http://schemas.microsoft.com/office/powerpoint/2010/main" xmlns:a16="http://schemas.microsoft.com/office/drawing/2014/main" xmlns="" w="9525">
                   <a:solidFill>
                     <a:srgbClr val="000000"/>
                   </a:solidFill>
@@ -19509,7 +19515,7 @@
             </a:ln>
             <a:extLst>
               <a:ext uri="{91240B29-F687-4f45-9708-019B960494DF}">
-                <a14:hiddenLine xmlns="" xmlns:a16="http://schemas.microsoft.com/office/drawing/2014/main" xmlns:p14="http://schemas.microsoft.com/office/powerpoint/2010/main" xmlns:a14="http://schemas.microsoft.com/office/drawing/2010/main" w="9525">
+                <a14:hiddenLine xmlns:a14="http://schemas.microsoft.com/office/drawing/2010/main" xmlns:p14="http://schemas.microsoft.com/office/powerpoint/2010/main" xmlns:a16="http://schemas.microsoft.com/office/drawing/2014/main" xmlns="" w="9525">
                   <a:solidFill>
                     <a:srgbClr val="000000"/>
                   </a:solidFill>
@@ -19651,7 +19657,7 @@
             </a:ln>
             <a:extLst>
               <a:ext uri="{91240B29-F687-4f45-9708-019B960494DF}">
-                <a14:hiddenLine xmlns="" xmlns:a16="http://schemas.microsoft.com/office/drawing/2014/main" xmlns:p14="http://schemas.microsoft.com/office/powerpoint/2010/main" xmlns:a14="http://schemas.microsoft.com/office/drawing/2010/main" w="9525">
+                <a14:hiddenLine xmlns:a14="http://schemas.microsoft.com/office/drawing/2010/main" xmlns:p14="http://schemas.microsoft.com/office/powerpoint/2010/main" xmlns:a16="http://schemas.microsoft.com/office/drawing/2014/main" xmlns="" w="9525">
                   <a:solidFill>
                     <a:srgbClr val="000000"/>
                   </a:solidFill>
@@ -20252,7 +20258,7 @@
           <a:p>
             <a:r>
               <a:rPr lang="pt-PT" dirty="0"/>
-              <a:t>Linha do tempRecorte temporal do experimento</a:t>
+              <a:t>Recorte temporal do experimento</a:t>
             </a:r>
           </a:p>
         </p:txBody>

--- a/output/Classificação Incremental e Auditável de Crimes em Notícias.pptx
+++ b/output/Classificação Incremental e Auditável de Crimes em Notícias.pptx
@@ -24,7 +24,8 @@
     <p:sldId id="272" r:id="rId18"/>
     <p:sldId id="273" r:id="rId19"/>
     <p:sldId id="274" r:id="rId20"/>
-    <p:sldId id="275" r:id="rId21"/>
+    <p:sldId id="276" r:id="rId21"/>
+    <p:sldId id="275" r:id="rId22"/>
   </p:sldIdLst>
   <p:sldSz cx="12192000" cy="6858000"/>
   <p:notesSz cx="6858000" cy="9144000"/>
@@ -181,7 +182,7 @@
           <a:noFill/>
           <a:extLst>
             <a:ext uri="{909E8E84-426E-40dd-AFC4-6F175D3DCCD1}">
-              <a14:hiddenFill xmlns="" xmlns:a14="http://schemas.microsoft.com/office/drawing/2010/main">
+              <a14:hiddenFill xmlns:a14="http://schemas.microsoft.com/office/drawing/2010/main" xmlns="">
                 <a:solidFill>
                   <a:srgbClr val="FFFFFF"/>
                 </a:solidFill>
@@ -241,7 +242,7 @@
             </a:ln>
             <a:extLst>
               <a:ext uri="{91240B29-F687-4f45-9708-019B960494DF}">
-                <a14:hiddenLine xmlns="" xmlns:a14="http://schemas.microsoft.com/office/drawing/2010/main" w="9525">
+                <a14:hiddenLine xmlns:a14="http://schemas.microsoft.com/office/drawing/2010/main" xmlns="" w="9525">
                   <a:solidFill>
                     <a:srgbClr val="000000"/>
                   </a:solidFill>
@@ -338,7 +339,7 @@
             </a:ln>
             <a:extLst>
               <a:ext uri="{91240B29-F687-4f45-9708-019B960494DF}">
-                <a14:hiddenLine xmlns="" xmlns:a14="http://schemas.microsoft.com/office/drawing/2010/main" w="9525">
+                <a14:hiddenLine xmlns:a14="http://schemas.microsoft.com/office/drawing/2010/main" xmlns="" w="9525">
                   <a:solidFill>
                     <a:srgbClr val="000000"/>
                   </a:solidFill>
@@ -435,7 +436,7 @@
             </a:ln>
             <a:extLst>
               <a:ext uri="{91240B29-F687-4f45-9708-019B960494DF}">
-                <a14:hiddenLine xmlns="" xmlns:a14="http://schemas.microsoft.com/office/drawing/2010/main" w="9525">
+                <a14:hiddenLine xmlns:a14="http://schemas.microsoft.com/office/drawing/2010/main" xmlns="" w="9525">
                   <a:solidFill>
                     <a:srgbClr val="000000"/>
                   </a:solidFill>
@@ -476,7 +477,7 @@
             </a:ln>
             <a:extLst>
               <a:ext uri="{91240B29-F687-4f45-9708-019B960494DF}">
-                <a14:hiddenLine xmlns="" xmlns:a14="http://schemas.microsoft.com/office/drawing/2010/main" w="9525">
+                <a14:hiddenLine xmlns:a14="http://schemas.microsoft.com/office/drawing/2010/main" xmlns="" w="9525">
                   <a:solidFill>
                     <a:srgbClr val="000000"/>
                   </a:solidFill>
@@ -573,7 +574,7 @@
             </a:ln>
             <a:extLst>
               <a:ext uri="{91240B29-F687-4f45-9708-019B960494DF}">
-                <a14:hiddenLine xmlns="" xmlns:a14="http://schemas.microsoft.com/office/drawing/2010/main" w="9525">
+                <a14:hiddenLine xmlns:a14="http://schemas.microsoft.com/office/drawing/2010/main" xmlns="" w="9525">
                   <a:solidFill>
                     <a:srgbClr val="000000"/>
                   </a:solidFill>
@@ -642,7 +643,7 @@
             </a:ln>
             <a:extLst>
               <a:ext uri="{91240B29-F687-4f45-9708-019B960494DF}">
-                <a14:hiddenLine xmlns="" xmlns:a14="http://schemas.microsoft.com/office/drawing/2010/main" w="9525">
+                <a14:hiddenLine xmlns:a14="http://schemas.microsoft.com/office/drawing/2010/main" xmlns="" w="9525">
                   <a:solidFill>
                     <a:srgbClr val="000000"/>
                   </a:solidFill>
@@ -711,7 +712,7 @@
             </a:ln>
             <a:extLst>
               <a:ext uri="{91240B29-F687-4f45-9708-019B960494DF}">
-                <a14:hiddenLine xmlns="" xmlns:a14="http://schemas.microsoft.com/office/drawing/2010/main" w="9525">
+                <a14:hiddenLine xmlns:a14="http://schemas.microsoft.com/office/drawing/2010/main" xmlns="" w="9525">
                   <a:solidFill>
                     <a:srgbClr val="000000"/>
                   </a:solidFill>
@@ -808,7 +809,7 @@
             </a:ln>
             <a:extLst>
               <a:ext uri="{91240B29-F687-4f45-9708-019B960494DF}">
-                <a14:hiddenLine xmlns="" xmlns:a14="http://schemas.microsoft.com/office/drawing/2010/main" w="9525">
+                <a14:hiddenLine xmlns:a14="http://schemas.microsoft.com/office/drawing/2010/main" xmlns="" w="9525">
                   <a:solidFill>
                     <a:srgbClr val="000000"/>
                   </a:solidFill>
@@ -877,7 +878,7 @@
             </a:ln>
             <a:extLst>
               <a:ext uri="{91240B29-F687-4f45-9708-019B960494DF}">
-                <a14:hiddenLine xmlns="" xmlns:a14="http://schemas.microsoft.com/office/drawing/2010/main" w="9525">
+                <a14:hiddenLine xmlns:a14="http://schemas.microsoft.com/office/drawing/2010/main" xmlns="" w="9525">
                   <a:solidFill>
                     <a:srgbClr val="000000"/>
                   </a:solidFill>
@@ -946,7 +947,7 @@
             </a:ln>
             <a:extLst>
               <a:ext uri="{91240B29-F687-4f45-9708-019B960494DF}">
-                <a14:hiddenLine xmlns="" xmlns:a14="http://schemas.microsoft.com/office/drawing/2010/main" w="9525">
+                <a14:hiddenLine xmlns:a14="http://schemas.microsoft.com/office/drawing/2010/main" xmlns="" w="9525">
                   <a:solidFill>
                     <a:srgbClr val="000000"/>
                   </a:solidFill>
@@ -1043,7 +1044,7 @@
             </a:ln>
             <a:extLst>
               <a:ext uri="{91240B29-F687-4f45-9708-019B960494DF}">
-                <a14:hiddenLine xmlns="" xmlns:a14="http://schemas.microsoft.com/office/drawing/2010/main" w="9525">
+                <a14:hiddenLine xmlns:a14="http://schemas.microsoft.com/office/drawing/2010/main" xmlns="" w="9525">
                   <a:solidFill>
                     <a:srgbClr val="000000"/>
                   </a:solidFill>
@@ -1140,7 +1141,7 @@
             </a:ln>
             <a:extLst>
               <a:ext uri="{91240B29-F687-4f45-9708-019B960494DF}">
-                <a14:hiddenLine xmlns="" xmlns:a14="http://schemas.microsoft.com/office/drawing/2010/main" w="9525">
+                <a14:hiddenLine xmlns:a14="http://schemas.microsoft.com/office/drawing/2010/main" xmlns="" w="9525">
                   <a:solidFill>
                     <a:srgbClr val="000000"/>
                   </a:solidFill>
@@ -1209,7 +1210,7 @@
             </a:ln>
             <a:extLst>
               <a:ext uri="{91240B29-F687-4f45-9708-019B960494DF}">
-                <a14:hiddenLine xmlns="" xmlns:a14="http://schemas.microsoft.com/office/drawing/2010/main" w="9525">
+                <a14:hiddenLine xmlns:a14="http://schemas.microsoft.com/office/drawing/2010/main" xmlns="" w="9525">
                   <a:solidFill>
                     <a:srgbClr val="000000"/>
                   </a:solidFill>
@@ -1326,7 +1327,7 @@
             </a:ln>
             <a:extLst>
               <a:ext uri="{91240B29-F687-4f45-9708-019B960494DF}">
-                <a14:hiddenLine xmlns="" xmlns:a14="http://schemas.microsoft.com/office/drawing/2010/main" w="9525">
+                <a14:hiddenLine xmlns:a14="http://schemas.microsoft.com/office/drawing/2010/main" xmlns="" w="9525">
                   <a:solidFill>
                     <a:srgbClr val="000000"/>
                   </a:solidFill>
@@ -1395,7 +1396,7 @@
             </a:ln>
             <a:extLst>
               <a:ext uri="{91240B29-F687-4f45-9708-019B960494DF}">
-                <a14:hiddenLine xmlns="" xmlns:a14="http://schemas.microsoft.com/office/drawing/2010/main" w="9525">
+                <a14:hiddenLine xmlns:a14="http://schemas.microsoft.com/office/drawing/2010/main" xmlns="" w="9525">
                   <a:solidFill>
                     <a:srgbClr val="000000"/>
                   </a:solidFill>
@@ -1492,7 +1493,7 @@
             </a:ln>
             <a:extLst>
               <a:ext uri="{91240B29-F687-4f45-9708-019B960494DF}">
-                <a14:hiddenLine xmlns="" xmlns:a14="http://schemas.microsoft.com/office/drawing/2010/main" w="9525">
+                <a14:hiddenLine xmlns:a14="http://schemas.microsoft.com/office/drawing/2010/main" xmlns="" w="9525">
                   <a:solidFill>
                     <a:srgbClr val="000000"/>
                   </a:solidFill>
@@ -1589,7 +1590,7 @@
             </a:ln>
             <a:extLst>
               <a:ext uri="{91240B29-F687-4f45-9708-019B960494DF}">
-                <a14:hiddenLine xmlns="" xmlns:a14="http://schemas.microsoft.com/office/drawing/2010/main" w="9525">
+                <a14:hiddenLine xmlns:a14="http://schemas.microsoft.com/office/drawing/2010/main" xmlns="" w="9525">
                   <a:solidFill>
                     <a:srgbClr val="000000"/>
                   </a:solidFill>
@@ -1658,7 +1659,7 @@
             </a:ln>
             <a:extLst>
               <a:ext uri="{91240B29-F687-4f45-9708-019B960494DF}">
-                <a14:hiddenLine xmlns="" xmlns:a14="http://schemas.microsoft.com/office/drawing/2010/main" w="9525">
+                <a14:hiddenLine xmlns:a14="http://schemas.microsoft.com/office/drawing/2010/main" xmlns="" w="9525">
                   <a:solidFill>
                     <a:srgbClr val="000000"/>
                   </a:solidFill>
@@ -1755,7 +1756,7 @@
             </a:ln>
             <a:extLst>
               <a:ext uri="{91240B29-F687-4f45-9708-019B960494DF}">
-                <a14:hiddenLine xmlns="" xmlns:a14="http://schemas.microsoft.com/office/drawing/2010/main" w="9525">
+                <a14:hiddenLine xmlns:a14="http://schemas.microsoft.com/office/drawing/2010/main" xmlns="" w="9525">
                   <a:solidFill>
                     <a:srgbClr val="000000"/>
                   </a:solidFill>
@@ -1852,7 +1853,7 @@
             </a:ln>
             <a:extLst>
               <a:ext uri="{91240B29-F687-4f45-9708-019B960494DF}">
-                <a14:hiddenLine xmlns="" xmlns:a14="http://schemas.microsoft.com/office/drawing/2010/main" w="9525">
+                <a14:hiddenLine xmlns:a14="http://schemas.microsoft.com/office/drawing/2010/main" xmlns="" w="9525">
                   <a:solidFill>
                     <a:srgbClr val="000000"/>
                   </a:solidFill>
@@ -1915,7 +1916,7 @@
             </a:ln>
             <a:extLst>
               <a:ext uri="{91240B29-F687-4f45-9708-019B960494DF}">
-                <a14:hiddenLine xmlns="" xmlns:a14="http://schemas.microsoft.com/office/drawing/2010/main" w="9525">
+                <a14:hiddenLine xmlns:a14="http://schemas.microsoft.com/office/drawing/2010/main" xmlns="" w="9525">
                   <a:solidFill>
                     <a:srgbClr val="000000"/>
                   </a:solidFill>
@@ -2012,7 +2013,7 @@
             </a:ln>
             <a:extLst>
               <a:ext uri="{91240B29-F687-4f45-9708-019B960494DF}">
-                <a14:hiddenLine xmlns="" xmlns:a14="http://schemas.microsoft.com/office/drawing/2010/main" w="9525">
+                <a14:hiddenLine xmlns:a14="http://schemas.microsoft.com/office/drawing/2010/main" xmlns="" w="9525">
                   <a:solidFill>
                     <a:srgbClr val="000000"/>
                   </a:solidFill>
@@ -2075,7 +2076,7 @@
             </a:ln>
             <a:extLst>
               <a:ext uri="{91240B29-F687-4f45-9708-019B960494DF}">
-                <a14:hiddenLine xmlns="" xmlns:a14="http://schemas.microsoft.com/office/drawing/2010/main" w="9525">
+                <a14:hiddenLine xmlns:a14="http://schemas.microsoft.com/office/drawing/2010/main" xmlns="" w="9525">
                   <a:solidFill>
                     <a:srgbClr val="000000"/>
                   </a:solidFill>
@@ -2172,7 +2173,7 @@
             </a:ln>
             <a:extLst>
               <a:ext uri="{91240B29-F687-4f45-9708-019B960494DF}">
-                <a14:hiddenLine xmlns="" xmlns:a14="http://schemas.microsoft.com/office/drawing/2010/main" w="9525">
+                <a14:hiddenLine xmlns:a14="http://schemas.microsoft.com/office/drawing/2010/main" xmlns="" w="9525">
                   <a:solidFill>
                     <a:srgbClr val="000000"/>
                   </a:solidFill>
@@ -2247,7 +2248,7 @@
             </a:ln>
             <a:extLst>
               <a:ext uri="{91240B29-F687-4f45-9708-019B960494DF}">
-                <a14:hiddenLine xmlns="" xmlns:a14="http://schemas.microsoft.com/office/drawing/2010/main" w="9525">
+                <a14:hiddenLine xmlns:a14="http://schemas.microsoft.com/office/drawing/2010/main" xmlns="" w="9525">
                   <a:solidFill>
                     <a:srgbClr val="000000"/>
                   </a:solidFill>
@@ -2344,7 +2345,7 @@
             </a:ln>
             <a:extLst>
               <a:ext uri="{91240B29-F687-4f45-9708-019B960494DF}">
-                <a14:hiddenLine xmlns="" xmlns:a14="http://schemas.microsoft.com/office/drawing/2010/main" w="9525">
+                <a14:hiddenLine xmlns:a14="http://schemas.microsoft.com/office/drawing/2010/main" xmlns="" w="9525">
                   <a:solidFill>
                     <a:srgbClr val="000000"/>
                   </a:solidFill>
@@ -2419,7 +2420,7 @@
             </a:ln>
             <a:extLst>
               <a:ext uri="{91240B29-F687-4f45-9708-019B960494DF}">
-                <a14:hiddenLine xmlns="" xmlns:a14="http://schemas.microsoft.com/office/drawing/2010/main" w="9525">
+                <a14:hiddenLine xmlns:a14="http://schemas.microsoft.com/office/drawing/2010/main" xmlns="" w="9525">
                   <a:solidFill>
                     <a:srgbClr val="000000"/>
                   </a:solidFill>
@@ -2516,7 +2517,7 @@
             </a:ln>
             <a:extLst>
               <a:ext uri="{91240B29-F687-4f45-9708-019B960494DF}">
-                <a14:hiddenLine xmlns="" xmlns:a14="http://schemas.microsoft.com/office/drawing/2010/main" w="9525">
+                <a14:hiddenLine xmlns:a14="http://schemas.microsoft.com/office/drawing/2010/main" xmlns="" w="9525">
                   <a:solidFill>
                     <a:srgbClr val="000000"/>
                   </a:solidFill>
@@ -2557,7 +2558,7 @@
             </a:ln>
             <a:extLst>
               <a:ext uri="{91240B29-F687-4f45-9708-019B960494DF}">
-                <a14:hiddenLine xmlns="" xmlns:a14="http://schemas.microsoft.com/office/drawing/2010/main" w="9525">
+                <a14:hiddenLine xmlns:a14="http://schemas.microsoft.com/office/drawing/2010/main" xmlns="" w="9525">
                   <a:solidFill>
                     <a:srgbClr val="000000"/>
                   </a:solidFill>
@@ -2654,7 +2655,7 @@
             </a:ln>
             <a:extLst>
               <a:ext uri="{91240B29-F687-4f45-9708-019B960494DF}">
-                <a14:hiddenLine xmlns="" xmlns:a14="http://schemas.microsoft.com/office/drawing/2010/main" w="9525">
+                <a14:hiddenLine xmlns:a14="http://schemas.microsoft.com/office/drawing/2010/main" xmlns="" w="9525">
                   <a:solidFill>
                     <a:srgbClr val="000000"/>
                   </a:solidFill>
@@ -2723,7 +2724,7 @@
             </a:ln>
             <a:extLst>
               <a:ext uri="{91240B29-F687-4f45-9708-019B960494DF}">
-                <a14:hiddenLine xmlns="" xmlns:a14="http://schemas.microsoft.com/office/drawing/2010/main" w="9525">
+                <a14:hiddenLine xmlns:a14="http://schemas.microsoft.com/office/drawing/2010/main" xmlns="" w="9525">
                   <a:solidFill>
                     <a:srgbClr val="000000"/>
                   </a:solidFill>
@@ -2792,7 +2793,7 @@
             </a:ln>
             <a:extLst>
               <a:ext uri="{91240B29-F687-4f45-9708-019B960494DF}">
-                <a14:hiddenLine xmlns="" xmlns:a14="http://schemas.microsoft.com/office/drawing/2010/main" w="9525">
+                <a14:hiddenLine xmlns:a14="http://schemas.microsoft.com/office/drawing/2010/main" xmlns="" w="9525">
                   <a:solidFill>
                     <a:srgbClr val="000000"/>
                   </a:solidFill>
@@ -2889,7 +2890,7 @@
             </a:ln>
             <a:extLst>
               <a:ext uri="{91240B29-F687-4f45-9708-019B960494DF}">
-                <a14:hiddenLine xmlns="" xmlns:a14="http://schemas.microsoft.com/office/drawing/2010/main" w="9525">
+                <a14:hiddenLine xmlns:a14="http://schemas.microsoft.com/office/drawing/2010/main" xmlns="" w="9525">
                   <a:solidFill>
                     <a:srgbClr val="000000"/>
                   </a:solidFill>
@@ -2964,7 +2965,7 @@
             </a:ln>
             <a:extLst>
               <a:ext uri="{91240B29-F687-4f45-9708-019B960494DF}">
-                <a14:hiddenLine xmlns="" xmlns:a14="http://schemas.microsoft.com/office/drawing/2010/main" w="9525">
+                <a14:hiddenLine xmlns:a14="http://schemas.microsoft.com/office/drawing/2010/main" xmlns="" w="9525">
                   <a:solidFill>
                     <a:srgbClr val="000000"/>
                   </a:solidFill>
@@ -3033,7 +3034,7 @@
             </a:ln>
             <a:extLst>
               <a:ext uri="{91240B29-F687-4f45-9708-019B960494DF}">
-                <a14:hiddenLine xmlns="" xmlns:a14="http://schemas.microsoft.com/office/drawing/2010/main" w="9525">
+                <a14:hiddenLine xmlns:a14="http://schemas.microsoft.com/office/drawing/2010/main" xmlns="" w="9525">
                   <a:solidFill>
                     <a:srgbClr val="000000"/>
                   </a:solidFill>
@@ -3130,7 +3131,7 @@
             </a:ln>
             <a:extLst>
               <a:ext uri="{91240B29-F687-4f45-9708-019B960494DF}">
-                <a14:hiddenLine xmlns="" xmlns:a14="http://schemas.microsoft.com/office/drawing/2010/main" w="9525">
+                <a14:hiddenLine xmlns:a14="http://schemas.microsoft.com/office/drawing/2010/main" xmlns="" w="9525">
                   <a:solidFill>
                     <a:srgbClr val="000000"/>
                   </a:solidFill>
@@ -3199,7 +3200,7 @@
             </a:ln>
             <a:extLst>
               <a:ext uri="{91240B29-F687-4f45-9708-019B960494DF}">
-                <a14:hiddenLine xmlns="" xmlns:a14="http://schemas.microsoft.com/office/drawing/2010/main" w="9525">
+                <a14:hiddenLine xmlns:a14="http://schemas.microsoft.com/office/drawing/2010/main" xmlns="" w="9525">
                   <a:solidFill>
                     <a:srgbClr val="000000"/>
                   </a:solidFill>
@@ -3296,7 +3297,7 @@
             </a:ln>
             <a:extLst>
               <a:ext uri="{91240B29-F687-4f45-9708-019B960494DF}">
-                <a14:hiddenLine xmlns="" xmlns:a14="http://schemas.microsoft.com/office/drawing/2010/main" w="9525">
+                <a14:hiddenLine xmlns:a14="http://schemas.microsoft.com/office/drawing/2010/main" xmlns="" w="9525">
                   <a:solidFill>
                     <a:srgbClr val="000000"/>
                   </a:solidFill>
@@ -3365,7 +3366,7 @@
             </a:ln>
             <a:extLst>
               <a:ext uri="{91240B29-F687-4f45-9708-019B960494DF}">
-                <a14:hiddenLine xmlns="" xmlns:a14="http://schemas.microsoft.com/office/drawing/2010/main" w="9525">
+                <a14:hiddenLine xmlns:a14="http://schemas.microsoft.com/office/drawing/2010/main" xmlns="" w="9525">
                   <a:solidFill>
                     <a:srgbClr val="000000"/>
                   </a:solidFill>
@@ -3462,7 +3463,7 @@
             </a:ln>
             <a:extLst>
               <a:ext uri="{91240B29-F687-4f45-9708-019B960494DF}">
-                <a14:hiddenLine xmlns="" xmlns:a14="http://schemas.microsoft.com/office/drawing/2010/main" w="9525">
+                <a14:hiddenLine xmlns:a14="http://schemas.microsoft.com/office/drawing/2010/main" xmlns="" w="9525">
                   <a:solidFill>
                     <a:srgbClr val="000000"/>
                   </a:solidFill>
@@ -3503,7 +3504,7 @@
             </a:ln>
             <a:extLst>
               <a:ext uri="{91240B29-F687-4f45-9708-019B960494DF}">
-                <a14:hiddenLine xmlns="" xmlns:a14="http://schemas.microsoft.com/office/drawing/2010/main" w="9525">
+                <a14:hiddenLine xmlns:a14="http://schemas.microsoft.com/office/drawing/2010/main" xmlns="" w="9525">
                   <a:solidFill>
                     <a:srgbClr val="000000"/>
                   </a:solidFill>
@@ -3575,7 +3576,7 @@
             </a:ln>
             <a:extLst>
               <a:ext uri="{91240B29-F687-4f45-9708-019B960494DF}">
-                <a14:hiddenLine xmlns="" xmlns:a14="http://schemas.microsoft.com/office/drawing/2010/main" w="9525">
+                <a14:hiddenLine xmlns:a14="http://schemas.microsoft.com/office/drawing/2010/main" xmlns="" w="9525">
                   <a:solidFill>
                     <a:srgbClr val="000000"/>
                   </a:solidFill>
@@ -3672,7 +3673,7 @@
             </a:ln>
             <a:extLst>
               <a:ext uri="{91240B29-F687-4f45-9708-019B960494DF}">
-                <a14:hiddenLine xmlns="" xmlns:a14="http://schemas.microsoft.com/office/drawing/2010/main" w="9525">
+                <a14:hiddenLine xmlns:a14="http://schemas.microsoft.com/office/drawing/2010/main" xmlns="" w="9525">
                   <a:solidFill>
                     <a:srgbClr val="000000"/>
                   </a:solidFill>
@@ -3741,7 +3742,7 @@
             </a:ln>
             <a:extLst>
               <a:ext uri="{91240B29-F687-4f45-9708-019B960494DF}">
-                <a14:hiddenLine xmlns="" xmlns:a14="http://schemas.microsoft.com/office/drawing/2010/main" w="9525">
+                <a14:hiddenLine xmlns:a14="http://schemas.microsoft.com/office/drawing/2010/main" xmlns="" w="9525">
                   <a:solidFill>
                     <a:srgbClr val="000000"/>
                   </a:solidFill>
@@ -3838,7 +3839,7 @@
             </a:ln>
             <a:extLst>
               <a:ext uri="{91240B29-F687-4f45-9708-019B960494DF}">
-                <a14:hiddenLine xmlns="" xmlns:a14="http://schemas.microsoft.com/office/drawing/2010/main" w="9525">
+                <a14:hiddenLine xmlns:a14="http://schemas.microsoft.com/office/drawing/2010/main" xmlns="" w="9525">
                   <a:solidFill>
                     <a:srgbClr val="000000"/>
                   </a:solidFill>
@@ -3935,7 +3936,7 @@
             </a:ln>
             <a:extLst>
               <a:ext uri="{91240B29-F687-4f45-9708-019B960494DF}">
-                <a14:hiddenLine xmlns="" xmlns:a14="http://schemas.microsoft.com/office/drawing/2010/main" w="9525">
+                <a14:hiddenLine xmlns:a14="http://schemas.microsoft.com/office/drawing/2010/main" xmlns="" w="9525">
                   <a:solidFill>
                     <a:srgbClr val="000000"/>
                   </a:solidFill>
@@ -4007,7 +4008,7 @@
             </a:ln>
             <a:extLst>
               <a:ext uri="{91240B29-F687-4f45-9708-019B960494DF}">
-                <a14:hiddenLine xmlns="" xmlns:a14="http://schemas.microsoft.com/office/drawing/2010/main" w="9525">
+                <a14:hiddenLine xmlns:a14="http://schemas.microsoft.com/office/drawing/2010/main" xmlns="" w="9525">
                   <a:solidFill>
                     <a:srgbClr val="000000"/>
                   </a:solidFill>
@@ -4076,7 +4077,7 @@
             </a:ln>
             <a:extLst>
               <a:ext uri="{91240B29-F687-4f45-9708-019B960494DF}">
-                <a14:hiddenLine xmlns="" xmlns:a14="http://schemas.microsoft.com/office/drawing/2010/main" w="9525">
+                <a14:hiddenLine xmlns:a14="http://schemas.microsoft.com/office/drawing/2010/main" xmlns="" w="9525">
                   <a:solidFill>
                     <a:srgbClr val="000000"/>
                   </a:solidFill>
@@ -4173,7 +4174,7 @@
             </a:ln>
             <a:extLst>
               <a:ext uri="{91240B29-F687-4f45-9708-019B960494DF}">
-                <a14:hiddenLine xmlns="" xmlns:a14="http://schemas.microsoft.com/office/drawing/2010/main" w="9525">
+                <a14:hiddenLine xmlns:a14="http://schemas.microsoft.com/office/drawing/2010/main" xmlns="" w="9525">
                   <a:solidFill>
                     <a:srgbClr val="000000"/>
                   </a:solidFill>
@@ -4270,7 +4271,7 @@
             </a:ln>
             <a:extLst>
               <a:ext uri="{91240B29-F687-4f45-9708-019B960494DF}">
-                <a14:hiddenLine xmlns="" xmlns:a14="http://schemas.microsoft.com/office/drawing/2010/main" w="9525">
+                <a14:hiddenLine xmlns:a14="http://schemas.microsoft.com/office/drawing/2010/main" xmlns="" w="9525">
                   <a:solidFill>
                     <a:srgbClr val="000000"/>
                   </a:solidFill>
@@ -4339,7 +4340,7 @@
             </a:ln>
             <a:extLst>
               <a:ext uri="{91240B29-F687-4f45-9708-019B960494DF}">
-                <a14:hiddenLine xmlns="" xmlns:a14="http://schemas.microsoft.com/office/drawing/2010/main" w="9525">
+                <a14:hiddenLine xmlns:a14="http://schemas.microsoft.com/office/drawing/2010/main" xmlns="" w="9525">
                   <a:solidFill>
                     <a:srgbClr val="000000"/>
                   </a:solidFill>
@@ -4466,7 +4467,7 @@
             </a:ln>
             <a:extLst>
               <a:ext uri="{91240B29-F687-4f45-9708-019B960494DF}">
-                <a14:hiddenLine xmlns="" xmlns:a14="http://schemas.microsoft.com/office/drawing/2010/main" w="9525">
+                <a14:hiddenLine xmlns:a14="http://schemas.microsoft.com/office/drawing/2010/main" xmlns="" w="9525">
                   <a:solidFill>
                     <a:srgbClr val="000000"/>
                   </a:solidFill>
@@ -4541,7 +4542,7 @@
             </a:ln>
             <a:extLst>
               <a:ext uri="{91240B29-F687-4f45-9708-019B960494DF}">
-                <a14:hiddenLine xmlns="" xmlns:a14="http://schemas.microsoft.com/office/drawing/2010/main" w="9525">
+                <a14:hiddenLine xmlns:a14="http://schemas.microsoft.com/office/drawing/2010/main" xmlns="" w="9525">
                   <a:solidFill>
                     <a:srgbClr val="000000"/>
                   </a:solidFill>
@@ -4638,7 +4639,7 @@
             </a:ln>
             <a:extLst>
               <a:ext uri="{91240B29-F687-4f45-9708-019B960494DF}">
-                <a14:hiddenLine xmlns="" xmlns:a14="http://schemas.microsoft.com/office/drawing/2010/main" w="9525">
+                <a14:hiddenLine xmlns:a14="http://schemas.microsoft.com/office/drawing/2010/main" xmlns="" w="9525">
                   <a:solidFill>
                     <a:srgbClr val="000000"/>
                   </a:solidFill>
@@ -4785,7 +4786,7 @@
           <a:p>
             <a:fld id="{48A87A34-81AB-432B-8DAE-1953F412C126}" type="datetimeFigureOut">
               <a:rPr lang="en-US" dirty="0"/>
-              <a:t>7/28/2026</a:t>
+              <a:t>8/9/2026</a:t>
             </a:fld>
             <a:endParaRPr lang="en-US" dirty="0"/>
           </a:p>
@@ -5047,7 +5048,7 @@
           <a:p>
             <a:fld id="{48A87A34-81AB-432B-8DAE-1953F412C126}" type="datetimeFigureOut">
               <a:rPr lang="en-US" dirty="0"/>
-              <a:t>7/28/2026</a:t>
+              <a:t>8/9/2026</a:t>
             </a:fld>
             <a:endParaRPr lang="en-US" dirty="0"/>
           </a:p>
@@ -5238,7 +5239,7 @@
           <a:p>
             <a:fld id="{48A87A34-81AB-432B-8DAE-1953F412C126}" type="datetimeFigureOut">
               <a:rPr lang="en-US" dirty="0"/>
-              <a:t>7/28/2026</a:t>
+              <a:t>8/9/2026</a:t>
             </a:fld>
             <a:endParaRPr lang="en-US" dirty="0"/>
           </a:p>
@@ -5496,7 +5497,7 @@
           <a:p>
             <a:fld id="{48A87A34-81AB-432B-8DAE-1953F412C126}" type="datetimeFigureOut">
               <a:rPr lang="en-US" dirty="0"/>
-              <a:t>7/28/2026</a:t>
+              <a:t>8/9/2026</a:t>
             </a:fld>
             <a:endParaRPr lang="en-US" dirty="0"/>
           </a:p>
@@ -5925,7 +5926,7 @@
           <a:p>
             <a:fld id="{48A87A34-81AB-432B-8DAE-1953F412C126}" type="datetimeFigureOut">
               <a:rPr lang="en-US" dirty="0"/>
-              <a:t>7/28/2026</a:t>
+              <a:t>8/9/2026</a:t>
             </a:fld>
             <a:endParaRPr lang="en-US" dirty="0"/>
           </a:p>
@@ -6466,7 +6467,7 @@
           <a:p>
             <a:fld id="{48A87A34-81AB-432B-8DAE-1953F412C126}" type="datetimeFigureOut">
               <a:rPr lang="en-US" dirty="0"/>
-              <a:t>7/28/2026</a:t>
+              <a:t>8/9/2026</a:t>
             </a:fld>
             <a:endParaRPr lang="en-US" dirty="0"/>
           </a:p>
@@ -7181,7 +7182,7 @@
           <a:p>
             <a:fld id="{48A87A34-81AB-432B-8DAE-1953F412C126}" type="datetimeFigureOut">
               <a:rPr lang="en-US" dirty="0"/>
-              <a:t>7/28/2026</a:t>
+              <a:t>8/9/2026</a:t>
             </a:fld>
             <a:endParaRPr lang="en-US" dirty="0"/>
           </a:p>
@@ -7346,7 +7347,7 @@
           <a:p>
             <a:fld id="{48A87A34-81AB-432B-8DAE-1953F412C126}" type="datetimeFigureOut">
               <a:rPr lang="en-US" dirty="0"/>
-              <a:t>7/28/2026</a:t>
+              <a:t>8/9/2026</a:t>
             </a:fld>
             <a:endParaRPr lang="en-US" dirty="0"/>
           </a:p>
@@ -7521,7 +7522,7 @@
           <a:p>
             <a:fld id="{48A87A34-81AB-432B-8DAE-1953F412C126}" type="datetimeFigureOut">
               <a:rPr lang="en-US" dirty="0"/>
-              <a:t>7/28/2026</a:t>
+              <a:t>8/9/2026</a:t>
             </a:fld>
             <a:endParaRPr lang="en-US" dirty="0"/>
           </a:p>
@@ -7686,7 +7687,7 @@
           <a:p>
             <a:fld id="{48A87A34-81AB-432B-8DAE-1953F412C126}" type="datetimeFigureOut">
               <a:rPr lang="en-US" dirty="0"/>
-              <a:t>7/28/2026</a:t>
+              <a:t>8/9/2026</a:t>
             </a:fld>
             <a:endParaRPr lang="en-US" dirty="0"/>
           </a:p>
@@ -7931,7 +7932,7 @@
           <a:p>
             <a:fld id="{48A87A34-81AB-432B-8DAE-1953F412C126}" type="datetimeFigureOut">
               <a:rPr lang="en-US" dirty="0"/>
-              <a:t>7/28/2026</a:t>
+              <a:t>8/9/2026</a:t>
             </a:fld>
             <a:endParaRPr lang="en-US" dirty="0"/>
           </a:p>
@@ -8158,7 +8159,7 @@
           <a:p>
             <a:fld id="{48A87A34-81AB-432B-8DAE-1953F412C126}" type="datetimeFigureOut">
               <a:rPr lang="en-US" dirty="0"/>
-              <a:t>7/28/2026</a:t>
+              <a:t>8/9/2026</a:t>
             </a:fld>
             <a:endParaRPr lang="en-US" dirty="0"/>
           </a:p>
@@ -8534,7 +8535,7 @@
           <a:p>
             <a:fld id="{48A87A34-81AB-432B-8DAE-1953F412C126}" type="datetimeFigureOut">
               <a:rPr lang="en-US" dirty="0"/>
-              <a:t>7/28/2026</a:t>
+              <a:t>8/9/2026</a:t>
             </a:fld>
             <a:endParaRPr lang="en-US" dirty="0"/>
           </a:p>
@@ -8647,7 +8648,7 @@
           <a:p>
             <a:fld id="{48A87A34-81AB-432B-8DAE-1953F412C126}" type="datetimeFigureOut">
               <a:rPr lang="en-US" dirty="0"/>
-              <a:t>7/28/2026</a:t>
+              <a:t>8/9/2026</a:t>
             </a:fld>
             <a:endParaRPr lang="en-US" dirty="0"/>
           </a:p>
@@ -8737,7 +8738,7 @@
           <a:p>
             <a:fld id="{48A87A34-81AB-432B-8DAE-1953F412C126}" type="datetimeFigureOut">
               <a:rPr lang="en-US" dirty="0"/>
-              <a:t>7/28/2026</a:t>
+              <a:t>8/9/2026</a:t>
             </a:fld>
             <a:endParaRPr lang="en-US" dirty="0"/>
           </a:p>
@@ -8981,7 +8982,7 @@
           <a:p>
             <a:fld id="{48A87A34-81AB-432B-8DAE-1953F412C126}" type="datetimeFigureOut">
               <a:rPr lang="en-US" dirty="0"/>
-              <a:t>7/28/2026</a:t>
+              <a:t>8/9/2026</a:t>
             </a:fld>
             <a:endParaRPr lang="en-US" dirty="0"/>
           </a:p>
@@ -9256,7 +9257,7 @@
           <a:p>
             <a:fld id="{48A87A34-81AB-432B-8DAE-1953F412C126}" type="datetimeFigureOut">
               <a:rPr lang="en-US" dirty="0"/>
-              <a:t>7/28/2026</a:t>
+              <a:t>8/9/2026</a:t>
             </a:fld>
             <a:endParaRPr lang="en-US" dirty="0"/>
           </a:p>
@@ -9367,7 +9368,7 @@
           <a:noFill/>
           <a:extLst>
             <a:ext uri="{909E8E84-426E-40dd-AFC4-6F175D3DCCD1}">
-              <a14:hiddenFill xmlns="" xmlns:a14="http://schemas.microsoft.com/office/drawing/2010/main">
+              <a14:hiddenFill xmlns:a14="http://schemas.microsoft.com/office/drawing/2010/main" xmlns="">
                 <a:solidFill>
                   <a:srgbClr val="FFFFFF"/>
                 </a:solidFill>
@@ -9441,7 +9442,7 @@
               </a:ln>
               <a:extLst>
                 <a:ext uri="{91240B29-F687-4f45-9708-019B960494DF}">
-                  <a14:hiddenLine xmlns="" xmlns:a14="http://schemas.microsoft.com/office/drawing/2010/main" w="9525">
+                  <a14:hiddenLine xmlns:a14="http://schemas.microsoft.com/office/drawing/2010/main" xmlns="" w="9525">
                     <a:solidFill>
                       <a:srgbClr val="000000"/>
                     </a:solidFill>
@@ -9538,7 +9539,7 @@
               </a:ln>
               <a:extLst>
                 <a:ext uri="{91240B29-F687-4f45-9708-019B960494DF}">
-                  <a14:hiddenLine xmlns="" xmlns:a14="http://schemas.microsoft.com/office/drawing/2010/main" w="9525">
+                  <a14:hiddenLine xmlns:a14="http://schemas.microsoft.com/office/drawing/2010/main" xmlns="" w="9525">
                     <a:solidFill>
                       <a:srgbClr val="000000"/>
                     </a:solidFill>
@@ -9635,7 +9636,7 @@
               </a:ln>
               <a:extLst>
                 <a:ext uri="{91240B29-F687-4f45-9708-019B960494DF}">
-                  <a14:hiddenLine xmlns="" xmlns:a14="http://schemas.microsoft.com/office/drawing/2010/main" w="9525">
+                  <a14:hiddenLine xmlns:a14="http://schemas.microsoft.com/office/drawing/2010/main" xmlns="" w="9525">
                     <a:solidFill>
                       <a:srgbClr val="000000"/>
                     </a:solidFill>
@@ -9704,7 +9705,7 @@
               </a:ln>
               <a:extLst>
                 <a:ext uri="{91240B29-F687-4f45-9708-019B960494DF}">
-                  <a14:hiddenLine xmlns="" xmlns:a14="http://schemas.microsoft.com/office/drawing/2010/main" w="9525">
+                  <a14:hiddenLine xmlns:a14="http://schemas.microsoft.com/office/drawing/2010/main" xmlns="" w="9525">
                     <a:solidFill>
                       <a:srgbClr val="000000"/>
                     </a:solidFill>
@@ -9801,7 +9802,7 @@
               </a:ln>
               <a:extLst>
                 <a:ext uri="{91240B29-F687-4f45-9708-019B960494DF}">
-                  <a14:hiddenLine xmlns="" xmlns:a14="http://schemas.microsoft.com/office/drawing/2010/main" w="9525">
+                  <a14:hiddenLine xmlns:a14="http://schemas.microsoft.com/office/drawing/2010/main" xmlns="" w="9525">
                     <a:solidFill>
                       <a:srgbClr val="000000"/>
                     </a:solidFill>
@@ -9870,7 +9871,7 @@
               </a:ln>
               <a:extLst>
                 <a:ext uri="{91240B29-F687-4f45-9708-019B960494DF}">
-                  <a14:hiddenLine xmlns="" xmlns:a14="http://schemas.microsoft.com/office/drawing/2010/main" w="9525">
+                  <a14:hiddenLine xmlns:a14="http://schemas.microsoft.com/office/drawing/2010/main" xmlns="" w="9525">
                     <a:solidFill>
                       <a:srgbClr val="000000"/>
                     </a:solidFill>
@@ -9939,7 +9940,7 @@
               </a:ln>
               <a:extLst>
                 <a:ext uri="{91240B29-F687-4f45-9708-019B960494DF}">
-                  <a14:hiddenLine xmlns="" xmlns:a14="http://schemas.microsoft.com/office/drawing/2010/main" w="9525">
+                  <a14:hiddenLine xmlns:a14="http://schemas.microsoft.com/office/drawing/2010/main" xmlns="" w="9525">
                     <a:solidFill>
                       <a:srgbClr val="000000"/>
                     </a:solidFill>
@@ -10036,7 +10037,7 @@
               </a:ln>
               <a:extLst>
                 <a:ext uri="{91240B29-F687-4f45-9708-019B960494DF}">
-                  <a14:hiddenLine xmlns="" xmlns:a14="http://schemas.microsoft.com/office/drawing/2010/main" w="9525">
+                  <a14:hiddenLine xmlns:a14="http://schemas.microsoft.com/office/drawing/2010/main" xmlns="" w="9525">
                     <a:solidFill>
                       <a:srgbClr val="000000"/>
                     </a:solidFill>
@@ -10133,7 +10134,7 @@
               </a:ln>
               <a:extLst>
                 <a:ext uri="{91240B29-F687-4f45-9708-019B960494DF}">
-                  <a14:hiddenLine xmlns="" xmlns:a14="http://schemas.microsoft.com/office/drawing/2010/main" w="9525">
+                  <a14:hiddenLine xmlns:a14="http://schemas.microsoft.com/office/drawing/2010/main" xmlns="" w="9525">
                     <a:solidFill>
                       <a:srgbClr val="000000"/>
                     </a:solidFill>
@@ -10202,7 +10203,7 @@
               </a:ln>
               <a:extLst>
                 <a:ext uri="{91240B29-F687-4f45-9708-019B960494DF}">
-                  <a14:hiddenLine xmlns="" xmlns:a14="http://schemas.microsoft.com/office/drawing/2010/main" w="9525">
+                  <a14:hiddenLine xmlns:a14="http://schemas.microsoft.com/office/drawing/2010/main" xmlns="" w="9525">
                     <a:solidFill>
                       <a:srgbClr val="000000"/>
                     </a:solidFill>
@@ -10319,7 +10320,7 @@
               </a:ln>
               <a:extLst>
                 <a:ext uri="{91240B29-F687-4f45-9708-019B960494DF}">
-                  <a14:hiddenLine xmlns="" xmlns:a14="http://schemas.microsoft.com/office/drawing/2010/main" w="9525">
+                  <a14:hiddenLine xmlns:a14="http://schemas.microsoft.com/office/drawing/2010/main" xmlns="" w="9525">
                     <a:solidFill>
                       <a:srgbClr val="000000"/>
                     </a:solidFill>
@@ -10417,7 +10418,7 @@
               </a:ln>
               <a:extLst>
                 <a:ext uri="{91240B29-F687-4f45-9708-019B960494DF}">
-                  <a14:hiddenLine xmlns="" xmlns:a14="http://schemas.microsoft.com/office/drawing/2010/main" w="9525">
+                  <a14:hiddenLine xmlns:a14="http://schemas.microsoft.com/office/drawing/2010/main" xmlns="" w="9525">
                     <a:solidFill>
                       <a:srgbClr val="000000"/>
                     </a:solidFill>
@@ -10486,7 +10487,7 @@
               </a:ln>
               <a:extLst>
                 <a:ext uri="{91240B29-F687-4f45-9708-019B960494DF}">
-                  <a14:hiddenLine xmlns="" xmlns:a14="http://schemas.microsoft.com/office/drawing/2010/main" w="9525">
+                  <a14:hiddenLine xmlns:a14="http://schemas.microsoft.com/office/drawing/2010/main" xmlns="" w="9525">
                     <a:solidFill>
                       <a:srgbClr val="000000"/>
                     </a:solidFill>
@@ -10555,7 +10556,7 @@
               </a:ln>
               <a:extLst>
                 <a:ext uri="{91240B29-F687-4f45-9708-019B960494DF}">
-                  <a14:hiddenLine xmlns="" xmlns:a14="http://schemas.microsoft.com/office/drawing/2010/main" w="9525">
+                  <a14:hiddenLine xmlns:a14="http://schemas.microsoft.com/office/drawing/2010/main" xmlns="" w="9525">
                     <a:solidFill>
                       <a:srgbClr val="000000"/>
                     </a:solidFill>
@@ -10652,7 +10653,7 @@
               </a:ln>
               <a:extLst>
                 <a:ext uri="{91240B29-F687-4f45-9708-019B960494DF}">
-                  <a14:hiddenLine xmlns="" xmlns:a14="http://schemas.microsoft.com/office/drawing/2010/main" w="9525">
+                  <a14:hiddenLine xmlns:a14="http://schemas.microsoft.com/office/drawing/2010/main" xmlns="" w="9525">
                     <a:solidFill>
                       <a:srgbClr val="000000"/>
                     </a:solidFill>
@@ -10693,7 +10694,7 @@
               </a:ln>
               <a:extLst>
                 <a:ext uri="{91240B29-F687-4f45-9708-019B960494DF}">
-                  <a14:hiddenLine xmlns="" xmlns:a14="http://schemas.microsoft.com/office/drawing/2010/main" w="9525">
+                  <a14:hiddenLine xmlns:a14="http://schemas.microsoft.com/office/drawing/2010/main" xmlns="" w="9525">
                     <a:solidFill>
                       <a:srgbClr val="000000"/>
                     </a:solidFill>
@@ -10765,7 +10766,7 @@
               </a:ln>
               <a:extLst>
                 <a:ext uri="{91240B29-F687-4f45-9708-019B960494DF}">
-                  <a14:hiddenLine xmlns="" xmlns:a14="http://schemas.microsoft.com/office/drawing/2010/main" w="9525">
+                  <a14:hiddenLine xmlns:a14="http://schemas.microsoft.com/office/drawing/2010/main" xmlns="" w="9525">
                     <a:solidFill>
                       <a:srgbClr val="000000"/>
                     </a:solidFill>
@@ -10862,7 +10863,7 @@
               </a:ln>
               <a:extLst>
                 <a:ext uri="{91240B29-F687-4f45-9708-019B960494DF}">
-                  <a14:hiddenLine xmlns="" xmlns:a14="http://schemas.microsoft.com/office/drawing/2010/main" w="9525">
+                  <a14:hiddenLine xmlns:a14="http://schemas.microsoft.com/office/drawing/2010/main" xmlns="" w="9525">
                     <a:solidFill>
                       <a:srgbClr val="000000"/>
                     </a:solidFill>
@@ -10931,7 +10932,7 @@
               </a:ln>
               <a:extLst>
                 <a:ext uri="{91240B29-F687-4f45-9708-019B960494DF}">
-                  <a14:hiddenLine xmlns="" xmlns:a14="http://schemas.microsoft.com/office/drawing/2010/main" w="9525">
+                  <a14:hiddenLine xmlns:a14="http://schemas.microsoft.com/office/drawing/2010/main" xmlns="" w="9525">
                     <a:solidFill>
                       <a:srgbClr val="000000"/>
                     </a:solidFill>
@@ -11028,7 +11029,7 @@
               </a:ln>
               <a:extLst>
                 <a:ext uri="{91240B29-F687-4f45-9708-019B960494DF}">
-                  <a14:hiddenLine xmlns="" xmlns:a14="http://schemas.microsoft.com/office/drawing/2010/main" w="9525">
+                  <a14:hiddenLine xmlns:a14="http://schemas.microsoft.com/office/drawing/2010/main" xmlns="" w="9525">
                     <a:solidFill>
                       <a:srgbClr val="000000"/>
                     </a:solidFill>
@@ -11100,7 +11101,7 @@
               </a:ln>
               <a:extLst>
                 <a:ext uri="{91240B29-F687-4f45-9708-019B960494DF}">
-                  <a14:hiddenLine xmlns="" xmlns:a14="http://schemas.microsoft.com/office/drawing/2010/main" w="9525">
+                  <a14:hiddenLine xmlns:a14="http://schemas.microsoft.com/office/drawing/2010/main" xmlns="" w="9525">
                     <a:solidFill>
                       <a:srgbClr val="000000"/>
                     </a:solidFill>
@@ -11169,7 +11170,7 @@
               </a:ln>
               <a:extLst>
                 <a:ext uri="{91240B29-F687-4f45-9708-019B960494DF}">
-                  <a14:hiddenLine xmlns="" xmlns:a14="http://schemas.microsoft.com/office/drawing/2010/main" w="9525">
+                  <a14:hiddenLine xmlns:a14="http://schemas.microsoft.com/office/drawing/2010/main" xmlns="" w="9525">
                     <a:solidFill>
                       <a:srgbClr val="000000"/>
                     </a:solidFill>
@@ -11266,7 +11267,7 @@
               </a:ln>
               <a:extLst>
                 <a:ext uri="{91240B29-F687-4f45-9708-019B960494DF}">
-                  <a14:hiddenLine xmlns="" xmlns:a14="http://schemas.microsoft.com/office/drawing/2010/main" w="9525">
+                  <a14:hiddenLine xmlns:a14="http://schemas.microsoft.com/office/drawing/2010/main" xmlns="" w="9525">
                     <a:solidFill>
                       <a:srgbClr val="000000"/>
                     </a:solidFill>
@@ -11363,7 +11364,7 @@
               </a:ln>
               <a:extLst>
                 <a:ext uri="{91240B29-F687-4f45-9708-019B960494DF}">
-                  <a14:hiddenLine xmlns="" xmlns:a14="http://schemas.microsoft.com/office/drawing/2010/main" w="9525">
+                  <a14:hiddenLine xmlns:a14="http://schemas.microsoft.com/office/drawing/2010/main" xmlns="" w="9525">
                     <a:solidFill>
                       <a:srgbClr val="000000"/>
                     </a:solidFill>
@@ -11435,7 +11436,7 @@
               </a:ln>
               <a:extLst>
                 <a:ext uri="{91240B29-F687-4f45-9708-019B960494DF}">
-                  <a14:hiddenLine xmlns="" xmlns:a14="http://schemas.microsoft.com/office/drawing/2010/main" w="9525">
+                  <a14:hiddenLine xmlns:a14="http://schemas.microsoft.com/office/drawing/2010/main" xmlns="" w="9525">
                     <a:solidFill>
                       <a:srgbClr val="000000"/>
                     </a:solidFill>
@@ -11562,7 +11563,7 @@
               </a:ln>
               <a:extLst>
                 <a:ext uri="{91240B29-F687-4f45-9708-019B960494DF}">
-                  <a14:hiddenLine xmlns="" xmlns:a14="http://schemas.microsoft.com/office/drawing/2010/main" w="9525">
+                  <a14:hiddenLine xmlns:a14="http://schemas.microsoft.com/office/drawing/2010/main" xmlns="" w="9525">
                     <a:solidFill>
                       <a:srgbClr val="000000"/>
                     </a:solidFill>
@@ -11667,7 +11668,7 @@
               </a:ln>
               <a:extLst>
                 <a:ext uri="{91240B29-F687-4f45-9708-019B960494DF}">
-                  <a14:hiddenLine xmlns="" xmlns:a14="http://schemas.microsoft.com/office/drawing/2010/main" w="9525">
+                  <a14:hiddenLine xmlns:a14="http://schemas.microsoft.com/office/drawing/2010/main" xmlns="" w="9525">
                     <a:solidFill>
                       <a:srgbClr val="000000"/>
                     </a:solidFill>
@@ -11789,7 +11790,7 @@
               </a:ln>
               <a:extLst>
                 <a:ext uri="{91240B29-F687-4f45-9708-019B960494DF}">
-                  <a14:hiddenLine xmlns="" xmlns:a14="http://schemas.microsoft.com/office/drawing/2010/main" w="9525">
+                  <a14:hiddenLine xmlns:a14="http://schemas.microsoft.com/office/drawing/2010/main" xmlns="" w="9525">
                     <a:solidFill>
                       <a:srgbClr val="000000"/>
                     </a:solidFill>
@@ -11886,7 +11887,7 @@
               </a:ln>
               <a:extLst>
                 <a:ext uri="{91240B29-F687-4f45-9708-019B960494DF}">
-                  <a14:hiddenLine xmlns="" xmlns:a14="http://schemas.microsoft.com/office/drawing/2010/main" w="9525">
+                  <a14:hiddenLine xmlns:a14="http://schemas.microsoft.com/office/drawing/2010/main" xmlns="" w="9525">
                     <a:solidFill>
                       <a:srgbClr val="000000"/>
                     </a:solidFill>
@@ -11958,7 +11959,7 @@
               </a:ln>
               <a:extLst>
                 <a:ext uri="{91240B29-F687-4f45-9708-019B960494DF}">
-                  <a14:hiddenLine xmlns="" xmlns:a14="http://schemas.microsoft.com/office/drawing/2010/main" w="9525">
+                  <a14:hiddenLine xmlns:a14="http://schemas.microsoft.com/office/drawing/2010/main" xmlns="" w="9525">
                     <a:solidFill>
                       <a:srgbClr val="000000"/>
                     </a:solidFill>
@@ -12055,7 +12056,7 @@
               </a:ln>
               <a:extLst>
                 <a:ext uri="{91240B29-F687-4f45-9708-019B960494DF}">
-                  <a14:hiddenLine xmlns="" xmlns:a14="http://schemas.microsoft.com/office/drawing/2010/main" w="9525">
+                  <a14:hiddenLine xmlns:a14="http://schemas.microsoft.com/office/drawing/2010/main" xmlns="" w="9525">
                     <a:solidFill>
                       <a:srgbClr val="000000"/>
                     </a:solidFill>
@@ -12130,7 +12131,7 @@
               </a:ln>
               <a:extLst>
                 <a:ext uri="{91240B29-F687-4f45-9708-019B960494DF}">
-                  <a14:hiddenLine xmlns="" xmlns:a14="http://schemas.microsoft.com/office/drawing/2010/main" w="9525">
+                  <a14:hiddenLine xmlns:a14="http://schemas.microsoft.com/office/drawing/2010/main" xmlns="" w="9525">
                     <a:solidFill>
                       <a:srgbClr val="000000"/>
                     </a:solidFill>
@@ -12227,7 +12228,7 @@
               </a:ln>
               <a:extLst>
                 <a:ext uri="{91240B29-F687-4f45-9708-019B960494DF}">
-                  <a14:hiddenLine xmlns="" xmlns:a14="http://schemas.microsoft.com/office/drawing/2010/main" w="9525">
+                  <a14:hiddenLine xmlns:a14="http://schemas.microsoft.com/office/drawing/2010/main" xmlns="" w="9525">
                     <a:solidFill>
                       <a:srgbClr val="000000"/>
                     </a:solidFill>
@@ -12302,7 +12303,7 @@
               </a:ln>
               <a:extLst>
                 <a:ext uri="{91240B29-F687-4f45-9708-019B960494DF}">
-                  <a14:hiddenLine xmlns="" xmlns:a14="http://schemas.microsoft.com/office/drawing/2010/main" w="9525">
+                  <a14:hiddenLine xmlns:a14="http://schemas.microsoft.com/office/drawing/2010/main" xmlns="" w="9525">
                     <a:solidFill>
                       <a:srgbClr val="000000"/>
                     </a:solidFill>
@@ -12399,7 +12400,7 @@
               </a:ln>
               <a:extLst>
                 <a:ext uri="{91240B29-F687-4f45-9708-019B960494DF}">
-                  <a14:hiddenLine xmlns="" xmlns:a14="http://schemas.microsoft.com/office/drawing/2010/main" w="9525">
+                  <a14:hiddenLine xmlns:a14="http://schemas.microsoft.com/office/drawing/2010/main" xmlns="" w="9525">
                     <a:solidFill>
                       <a:srgbClr val="000000"/>
                     </a:solidFill>
@@ -12440,7 +12441,7 @@
               </a:ln>
               <a:extLst>
                 <a:ext uri="{91240B29-F687-4f45-9708-019B960494DF}">
-                  <a14:hiddenLine xmlns="" xmlns:a14="http://schemas.microsoft.com/office/drawing/2010/main" w="9525">
+                  <a14:hiddenLine xmlns:a14="http://schemas.microsoft.com/office/drawing/2010/main" xmlns="" w="9525">
                     <a:solidFill>
                       <a:srgbClr val="000000"/>
                     </a:solidFill>
@@ -12588,7 +12589,7 @@
             <a:fld id="{48A87A34-81AB-432B-8DAE-1953F412C126}" type="datetimeFigureOut">
               <a:rPr lang="en-US" dirty="0"/>
               <a:pPr/>
-              <a:t>7/28/2026</a:t>
+              <a:t>8/9/2026</a:t>
             </a:fld>
             <a:endParaRPr lang="en-US" dirty="0"/>
           </a:p>
@@ -13466,7 +13467,7 @@
           <a:noFill/>
           <a:extLst>
             <a:ext uri="{909E8E84-426E-40dd-AFC4-6F175D3DCCD1}">
-              <a14:hiddenFill xmlns:a14="http://schemas.microsoft.com/office/drawing/2010/main" xmlns:p14="http://schemas.microsoft.com/office/powerpoint/2010/main" xmlns:a16="http://schemas.microsoft.com/office/drawing/2014/main" xmlns="">
+              <a14:hiddenFill xmlns="" xmlns:a16="http://schemas.microsoft.com/office/drawing/2014/main" xmlns:p14="http://schemas.microsoft.com/office/powerpoint/2010/main" xmlns:a14="http://schemas.microsoft.com/office/drawing/2010/main">
                 <a:solidFill>
                   <a:srgbClr val="FFFFFF"/>
                 </a:solidFill>
@@ -13710,7 +13711,7 @@
             </a:ln>
             <a:extLst>
               <a:ext uri="{91240B29-F687-4f45-9708-019B960494DF}">
-                <a14:hiddenLine xmlns:a14="http://schemas.microsoft.com/office/drawing/2010/main" xmlns:p14="http://schemas.microsoft.com/office/powerpoint/2010/main" xmlns:a16="http://schemas.microsoft.com/office/drawing/2014/main" xmlns="" w="9525">
+                <a14:hiddenLine xmlns="" xmlns:a16="http://schemas.microsoft.com/office/drawing/2014/main" xmlns:p14="http://schemas.microsoft.com/office/powerpoint/2010/main" xmlns:a14="http://schemas.microsoft.com/office/drawing/2010/main" w="9525">
                   <a:solidFill>
                     <a:srgbClr val="000000"/>
                   </a:solidFill>
@@ -13822,7 +13823,7 @@
             </a:ln>
             <a:extLst>
               <a:ext uri="{91240B29-F687-4f45-9708-019B960494DF}">
-                <a14:hiddenLine xmlns:a14="http://schemas.microsoft.com/office/drawing/2010/main" xmlns:p14="http://schemas.microsoft.com/office/powerpoint/2010/main" xmlns:a16="http://schemas.microsoft.com/office/drawing/2014/main" xmlns="" w="9525">
+                <a14:hiddenLine xmlns="" xmlns:a16="http://schemas.microsoft.com/office/drawing/2014/main" xmlns:p14="http://schemas.microsoft.com/office/powerpoint/2010/main" xmlns:a14="http://schemas.microsoft.com/office/drawing/2010/main" w="9525">
                   <a:solidFill>
                     <a:srgbClr val="000000"/>
                   </a:solidFill>
@@ -13934,7 +13935,7 @@
             </a:ln>
             <a:extLst>
               <a:ext uri="{91240B29-F687-4f45-9708-019B960494DF}">
-                <a14:hiddenLine xmlns:a14="http://schemas.microsoft.com/office/drawing/2010/main" xmlns:p14="http://schemas.microsoft.com/office/powerpoint/2010/main" xmlns:a16="http://schemas.microsoft.com/office/drawing/2014/main" xmlns="" w="9525">
+                <a14:hiddenLine xmlns="" xmlns:a16="http://schemas.microsoft.com/office/drawing/2014/main" xmlns:p14="http://schemas.microsoft.com/office/powerpoint/2010/main" xmlns:a14="http://schemas.microsoft.com/office/drawing/2010/main" w="9525">
                   <a:solidFill>
                     <a:srgbClr val="000000"/>
                   </a:solidFill>
@@ -14018,7 +14019,7 @@
             </a:ln>
             <a:extLst>
               <a:ext uri="{91240B29-F687-4f45-9708-019B960494DF}">
-                <a14:hiddenLine xmlns:a14="http://schemas.microsoft.com/office/drawing/2010/main" xmlns:p14="http://schemas.microsoft.com/office/powerpoint/2010/main" xmlns:a16="http://schemas.microsoft.com/office/drawing/2014/main" xmlns="" w="9525">
+                <a14:hiddenLine xmlns="" xmlns:a16="http://schemas.microsoft.com/office/drawing/2014/main" xmlns:p14="http://schemas.microsoft.com/office/powerpoint/2010/main" xmlns:a14="http://schemas.microsoft.com/office/drawing/2010/main" w="9525">
                   <a:solidFill>
                     <a:srgbClr val="000000"/>
                   </a:solidFill>
@@ -14130,7 +14131,7 @@
             </a:ln>
             <a:extLst>
               <a:ext uri="{91240B29-F687-4f45-9708-019B960494DF}">
-                <a14:hiddenLine xmlns:a14="http://schemas.microsoft.com/office/drawing/2010/main" xmlns:p14="http://schemas.microsoft.com/office/powerpoint/2010/main" xmlns:a16="http://schemas.microsoft.com/office/drawing/2014/main" xmlns="" w="9525">
+                <a14:hiddenLine xmlns="" xmlns:a16="http://schemas.microsoft.com/office/drawing/2014/main" xmlns:p14="http://schemas.microsoft.com/office/powerpoint/2010/main" xmlns:a14="http://schemas.microsoft.com/office/drawing/2010/main" w="9525">
                   <a:solidFill>
                     <a:srgbClr val="000000"/>
                   </a:solidFill>
@@ -14214,7 +14215,7 @@
             </a:ln>
             <a:extLst>
               <a:ext uri="{91240B29-F687-4f45-9708-019B960494DF}">
-                <a14:hiddenLine xmlns:a14="http://schemas.microsoft.com/office/drawing/2010/main" xmlns:p14="http://schemas.microsoft.com/office/powerpoint/2010/main" xmlns:a16="http://schemas.microsoft.com/office/drawing/2014/main" xmlns="" w="9525">
+                <a14:hiddenLine xmlns="" xmlns:a16="http://schemas.microsoft.com/office/drawing/2014/main" xmlns:p14="http://schemas.microsoft.com/office/powerpoint/2010/main" xmlns:a14="http://schemas.microsoft.com/office/drawing/2010/main" w="9525">
                   <a:solidFill>
                     <a:srgbClr val="000000"/>
                   </a:solidFill>
@@ -14298,7 +14299,7 @@
             </a:ln>
             <a:extLst>
               <a:ext uri="{91240B29-F687-4f45-9708-019B960494DF}">
-                <a14:hiddenLine xmlns:a14="http://schemas.microsoft.com/office/drawing/2010/main" xmlns:p14="http://schemas.microsoft.com/office/powerpoint/2010/main" xmlns:a16="http://schemas.microsoft.com/office/drawing/2014/main" xmlns="" w="9525">
+                <a14:hiddenLine xmlns="" xmlns:a16="http://schemas.microsoft.com/office/drawing/2014/main" xmlns:p14="http://schemas.microsoft.com/office/powerpoint/2010/main" xmlns:a14="http://schemas.microsoft.com/office/drawing/2010/main" w="9525">
                   <a:solidFill>
                     <a:srgbClr val="000000"/>
                   </a:solidFill>
@@ -14410,7 +14411,7 @@
             </a:ln>
             <a:extLst>
               <a:ext uri="{91240B29-F687-4f45-9708-019B960494DF}">
-                <a14:hiddenLine xmlns:a14="http://schemas.microsoft.com/office/drawing/2010/main" xmlns:p14="http://schemas.microsoft.com/office/powerpoint/2010/main" xmlns:a16="http://schemas.microsoft.com/office/drawing/2014/main" xmlns="" w="9525">
+                <a14:hiddenLine xmlns="" xmlns:a16="http://schemas.microsoft.com/office/drawing/2014/main" xmlns:p14="http://schemas.microsoft.com/office/powerpoint/2010/main" xmlns:a14="http://schemas.microsoft.com/office/drawing/2010/main" w="9525">
                   <a:solidFill>
                     <a:srgbClr val="000000"/>
                   </a:solidFill>
@@ -14522,7 +14523,7 @@
             </a:ln>
             <a:extLst>
               <a:ext uri="{91240B29-F687-4f45-9708-019B960494DF}">
-                <a14:hiddenLine xmlns:a14="http://schemas.microsoft.com/office/drawing/2010/main" xmlns:p14="http://schemas.microsoft.com/office/powerpoint/2010/main" xmlns:a16="http://schemas.microsoft.com/office/drawing/2014/main" xmlns="" w="9525">
+                <a14:hiddenLine xmlns="" xmlns:a16="http://schemas.microsoft.com/office/drawing/2014/main" xmlns:p14="http://schemas.microsoft.com/office/powerpoint/2010/main" xmlns:a14="http://schemas.microsoft.com/office/drawing/2010/main" w="9525">
                   <a:solidFill>
                     <a:srgbClr val="000000"/>
                   </a:solidFill>
@@ -14606,7 +14607,7 @@
             </a:ln>
             <a:extLst>
               <a:ext uri="{91240B29-F687-4f45-9708-019B960494DF}">
-                <a14:hiddenLine xmlns:a14="http://schemas.microsoft.com/office/drawing/2010/main" xmlns:p14="http://schemas.microsoft.com/office/powerpoint/2010/main" xmlns:a16="http://schemas.microsoft.com/office/drawing/2014/main" xmlns="" w="9525">
+                <a14:hiddenLine xmlns="" xmlns:a16="http://schemas.microsoft.com/office/drawing/2014/main" xmlns:p14="http://schemas.microsoft.com/office/powerpoint/2010/main" xmlns:a14="http://schemas.microsoft.com/office/drawing/2010/main" w="9525">
                   <a:solidFill>
                     <a:srgbClr val="000000"/>
                   </a:solidFill>
@@ -14738,7 +14739,7 @@
             </a:ln>
             <a:extLst>
               <a:ext uri="{91240B29-F687-4f45-9708-019B960494DF}">
-                <a14:hiddenLine xmlns:a14="http://schemas.microsoft.com/office/drawing/2010/main" xmlns:p14="http://schemas.microsoft.com/office/powerpoint/2010/main" xmlns:a16="http://schemas.microsoft.com/office/drawing/2014/main" xmlns="" w="9525">
+                <a14:hiddenLine xmlns="" xmlns:a16="http://schemas.microsoft.com/office/drawing/2014/main" xmlns:p14="http://schemas.microsoft.com/office/powerpoint/2010/main" xmlns:a14="http://schemas.microsoft.com/office/drawing/2010/main" w="9525">
                   <a:solidFill>
                     <a:srgbClr val="000000"/>
                   </a:solidFill>
@@ -14866,7 +14867,7 @@
             </a:ln>
             <a:extLst>
               <a:ext uri="{91240B29-F687-4f45-9708-019B960494DF}">
-                <a14:hiddenLine xmlns:a14="http://schemas.microsoft.com/office/drawing/2010/main" xmlns:p14="http://schemas.microsoft.com/office/powerpoint/2010/main" xmlns:a16="http://schemas.microsoft.com/office/drawing/2014/main" xmlns="" w="9525">
+                <a14:hiddenLine xmlns="" xmlns:a16="http://schemas.microsoft.com/office/drawing/2014/main" xmlns:p14="http://schemas.microsoft.com/office/powerpoint/2010/main" xmlns:a14="http://schemas.microsoft.com/office/drawing/2010/main" w="9525">
                   <a:solidFill>
                     <a:srgbClr val="000000"/>
                   </a:solidFill>
@@ -14950,7 +14951,7 @@
             </a:ln>
             <a:extLst>
               <a:ext uri="{91240B29-F687-4f45-9708-019B960494DF}">
-                <a14:hiddenLine xmlns:a14="http://schemas.microsoft.com/office/drawing/2010/main" xmlns:p14="http://schemas.microsoft.com/office/powerpoint/2010/main" xmlns:a16="http://schemas.microsoft.com/office/drawing/2014/main" xmlns="" w="9525">
+                <a14:hiddenLine xmlns="" xmlns:a16="http://schemas.microsoft.com/office/drawing/2014/main" xmlns:p14="http://schemas.microsoft.com/office/powerpoint/2010/main" xmlns:a14="http://schemas.microsoft.com/office/drawing/2010/main" w="9525">
                   <a:solidFill>
                     <a:srgbClr val="000000"/>
                   </a:solidFill>
@@ -15034,7 +15035,7 @@
             </a:ln>
             <a:extLst>
               <a:ext uri="{91240B29-F687-4f45-9708-019B960494DF}">
-                <a14:hiddenLine xmlns:a14="http://schemas.microsoft.com/office/drawing/2010/main" xmlns:p14="http://schemas.microsoft.com/office/powerpoint/2010/main" xmlns:a16="http://schemas.microsoft.com/office/drawing/2014/main" xmlns="" w="9525">
+                <a14:hiddenLine xmlns="" xmlns:a16="http://schemas.microsoft.com/office/drawing/2014/main" xmlns:p14="http://schemas.microsoft.com/office/powerpoint/2010/main" xmlns:a14="http://schemas.microsoft.com/office/drawing/2010/main" w="9525">
                   <a:solidFill>
                     <a:srgbClr val="000000"/>
                   </a:solidFill>
@@ -15146,7 +15147,7 @@
             </a:ln>
             <a:extLst>
               <a:ext uri="{91240B29-F687-4f45-9708-019B960494DF}">
-                <a14:hiddenLine xmlns:a14="http://schemas.microsoft.com/office/drawing/2010/main" xmlns:p14="http://schemas.microsoft.com/office/powerpoint/2010/main" xmlns:a16="http://schemas.microsoft.com/office/drawing/2014/main" xmlns="" w="9525">
+                <a14:hiddenLine xmlns="" xmlns:a16="http://schemas.microsoft.com/office/drawing/2014/main" xmlns:p14="http://schemas.microsoft.com/office/powerpoint/2010/main" xmlns:a14="http://schemas.microsoft.com/office/drawing/2010/main" w="9525">
                   <a:solidFill>
                     <a:srgbClr val="000000"/>
                   </a:solidFill>
@@ -15202,7 +15203,7 @@
             </a:ln>
             <a:extLst>
               <a:ext uri="{91240B29-F687-4f45-9708-019B960494DF}">
-                <a14:hiddenLine xmlns:a14="http://schemas.microsoft.com/office/drawing/2010/main" xmlns:p14="http://schemas.microsoft.com/office/powerpoint/2010/main" xmlns:a16="http://schemas.microsoft.com/office/drawing/2014/main" xmlns="" w="9525">
+                <a14:hiddenLine xmlns="" xmlns:a16="http://schemas.microsoft.com/office/drawing/2014/main" xmlns:p14="http://schemas.microsoft.com/office/powerpoint/2010/main" xmlns:a14="http://schemas.microsoft.com/office/drawing/2010/main" w="9525">
                   <a:solidFill>
                     <a:srgbClr val="000000"/>
                   </a:solidFill>
@@ -15289,7 +15290,7 @@
             </a:ln>
             <a:extLst>
               <a:ext uri="{91240B29-F687-4f45-9708-019B960494DF}">
-                <a14:hiddenLine xmlns:a14="http://schemas.microsoft.com/office/drawing/2010/main" xmlns:p14="http://schemas.microsoft.com/office/powerpoint/2010/main" xmlns:a16="http://schemas.microsoft.com/office/drawing/2014/main" xmlns="" w="9525">
+                <a14:hiddenLine xmlns="" xmlns:a16="http://schemas.microsoft.com/office/drawing/2014/main" xmlns:p14="http://schemas.microsoft.com/office/powerpoint/2010/main" xmlns:a14="http://schemas.microsoft.com/office/drawing/2010/main" w="9525">
                   <a:solidFill>
                     <a:srgbClr val="000000"/>
                   </a:solidFill>
@@ -15401,7 +15402,7 @@
             </a:ln>
             <a:extLst>
               <a:ext uri="{91240B29-F687-4f45-9708-019B960494DF}">
-                <a14:hiddenLine xmlns:a14="http://schemas.microsoft.com/office/drawing/2010/main" xmlns:p14="http://schemas.microsoft.com/office/powerpoint/2010/main" xmlns:a16="http://schemas.microsoft.com/office/drawing/2014/main" xmlns="" w="9525">
+                <a14:hiddenLine xmlns="" xmlns:a16="http://schemas.microsoft.com/office/drawing/2014/main" xmlns:p14="http://schemas.microsoft.com/office/powerpoint/2010/main" xmlns:a14="http://schemas.microsoft.com/office/drawing/2010/main" w="9525">
                   <a:solidFill>
                     <a:srgbClr val="000000"/>
                   </a:solidFill>
@@ -15485,7 +15486,7 @@
             </a:ln>
             <a:extLst>
               <a:ext uri="{91240B29-F687-4f45-9708-019B960494DF}">
-                <a14:hiddenLine xmlns:a14="http://schemas.microsoft.com/office/drawing/2010/main" xmlns:p14="http://schemas.microsoft.com/office/powerpoint/2010/main" xmlns:a16="http://schemas.microsoft.com/office/drawing/2014/main" xmlns="" w="9525">
+                <a14:hiddenLine xmlns="" xmlns:a16="http://schemas.microsoft.com/office/drawing/2014/main" xmlns:p14="http://schemas.microsoft.com/office/powerpoint/2010/main" xmlns:a14="http://schemas.microsoft.com/office/drawing/2010/main" w="9525">
                   <a:solidFill>
                     <a:srgbClr val="000000"/>
                   </a:solidFill>
@@ -15597,7 +15598,7 @@
             </a:ln>
             <a:extLst>
               <a:ext uri="{91240B29-F687-4f45-9708-019B960494DF}">
-                <a14:hiddenLine xmlns:a14="http://schemas.microsoft.com/office/drawing/2010/main" xmlns:p14="http://schemas.microsoft.com/office/powerpoint/2010/main" xmlns:a16="http://schemas.microsoft.com/office/drawing/2014/main" xmlns="" w="9525">
+                <a14:hiddenLine xmlns="" xmlns:a16="http://schemas.microsoft.com/office/drawing/2014/main" xmlns:p14="http://schemas.microsoft.com/office/powerpoint/2010/main" xmlns:a14="http://schemas.microsoft.com/office/drawing/2010/main" w="9525">
                   <a:solidFill>
                     <a:srgbClr val="000000"/>
                   </a:solidFill>
@@ -15684,7 +15685,7 @@
             </a:ln>
             <a:extLst>
               <a:ext uri="{91240B29-F687-4f45-9708-019B960494DF}">
-                <a14:hiddenLine xmlns:a14="http://schemas.microsoft.com/office/drawing/2010/main" xmlns:p14="http://schemas.microsoft.com/office/powerpoint/2010/main" xmlns:a16="http://schemas.microsoft.com/office/drawing/2014/main" xmlns="" w="9525">
+                <a14:hiddenLine xmlns="" xmlns:a16="http://schemas.microsoft.com/office/drawing/2014/main" xmlns:p14="http://schemas.microsoft.com/office/powerpoint/2010/main" xmlns:a14="http://schemas.microsoft.com/office/drawing/2010/main" w="9525">
                   <a:solidFill>
                     <a:srgbClr val="000000"/>
                   </a:solidFill>
@@ -15768,7 +15769,7 @@
             </a:ln>
             <a:extLst>
               <a:ext uri="{91240B29-F687-4f45-9708-019B960494DF}">
-                <a14:hiddenLine xmlns:a14="http://schemas.microsoft.com/office/drawing/2010/main" xmlns:p14="http://schemas.microsoft.com/office/powerpoint/2010/main" xmlns:a16="http://schemas.microsoft.com/office/drawing/2014/main" xmlns="" w="9525">
+                <a14:hiddenLine xmlns="" xmlns:a16="http://schemas.microsoft.com/office/drawing/2014/main" xmlns:p14="http://schemas.microsoft.com/office/powerpoint/2010/main" xmlns:a14="http://schemas.microsoft.com/office/drawing/2010/main" w="9525">
                   <a:solidFill>
                     <a:srgbClr val="000000"/>
                   </a:solidFill>
@@ -15880,7 +15881,7 @@
             </a:ln>
             <a:extLst>
               <a:ext uri="{91240B29-F687-4f45-9708-019B960494DF}">
-                <a14:hiddenLine xmlns:a14="http://schemas.microsoft.com/office/drawing/2010/main" xmlns:p14="http://schemas.microsoft.com/office/powerpoint/2010/main" xmlns:a16="http://schemas.microsoft.com/office/drawing/2014/main" xmlns="" w="9525">
+                <a14:hiddenLine xmlns="" xmlns:a16="http://schemas.microsoft.com/office/drawing/2014/main" xmlns:p14="http://schemas.microsoft.com/office/powerpoint/2010/main" xmlns:a14="http://schemas.microsoft.com/office/drawing/2010/main" w="9525">
                   <a:solidFill>
                     <a:srgbClr val="000000"/>
                   </a:solidFill>
@@ -15992,7 +15993,7 @@
             </a:ln>
             <a:extLst>
               <a:ext uri="{91240B29-F687-4f45-9708-019B960494DF}">
-                <a14:hiddenLine xmlns:a14="http://schemas.microsoft.com/office/drawing/2010/main" xmlns:p14="http://schemas.microsoft.com/office/powerpoint/2010/main" xmlns:a16="http://schemas.microsoft.com/office/drawing/2014/main" xmlns="" w="9525">
+                <a14:hiddenLine xmlns="" xmlns:a16="http://schemas.microsoft.com/office/drawing/2014/main" xmlns:p14="http://schemas.microsoft.com/office/powerpoint/2010/main" xmlns:a14="http://schemas.microsoft.com/office/drawing/2010/main" w="9525">
                   <a:solidFill>
                     <a:srgbClr val="000000"/>
                   </a:solidFill>
@@ -16079,7 +16080,7 @@
             </a:ln>
             <a:extLst>
               <a:ext uri="{91240B29-F687-4f45-9708-019B960494DF}">
-                <a14:hiddenLine xmlns:a14="http://schemas.microsoft.com/office/drawing/2010/main" xmlns:p14="http://schemas.microsoft.com/office/powerpoint/2010/main" xmlns:a16="http://schemas.microsoft.com/office/drawing/2014/main" xmlns="" w="9525">
+                <a14:hiddenLine xmlns="" xmlns:a16="http://schemas.microsoft.com/office/drawing/2014/main" xmlns:p14="http://schemas.microsoft.com/office/powerpoint/2010/main" xmlns:a14="http://schemas.microsoft.com/office/drawing/2010/main" w="9525">
                   <a:solidFill>
                     <a:srgbClr val="000000"/>
                   </a:solidFill>
@@ -16221,7 +16222,7 @@
             </a:ln>
             <a:extLst>
               <a:ext uri="{91240B29-F687-4f45-9708-019B960494DF}">
-                <a14:hiddenLine xmlns:a14="http://schemas.microsoft.com/office/drawing/2010/main" xmlns:p14="http://schemas.microsoft.com/office/powerpoint/2010/main" xmlns:a16="http://schemas.microsoft.com/office/drawing/2014/main" xmlns="" w="9525">
+                <a14:hiddenLine xmlns="" xmlns:a16="http://schemas.microsoft.com/office/drawing/2014/main" xmlns:p14="http://schemas.microsoft.com/office/powerpoint/2010/main" xmlns:a14="http://schemas.microsoft.com/office/drawing/2010/main" w="9525">
                   <a:solidFill>
                     <a:srgbClr val="000000"/>
                   </a:solidFill>
@@ -17146,7 +17147,7 @@
             </a:ln>
             <a:extLst>
               <a:ext uri="{91240B29-F687-4f45-9708-019B960494DF}">
-                <a14:hiddenLine xmlns:a14="http://schemas.microsoft.com/office/drawing/2010/main" xmlns:p14="http://schemas.microsoft.com/office/powerpoint/2010/main" xmlns:a16="http://schemas.microsoft.com/office/drawing/2014/main" xmlns="" w="9525">
+                <a14:hiddenLine xmlns="" xmlns:a16="http://schemas.microsoft.com/office/drawing/2014/main" xmlns:p14="http://schemas.microsoft.com/office/powerpoint/2010/main" xmlns:a14="http://schemas.microsoft.com/office/drawing/2010/main" w="9525">
                   <a:solidFill>
                     <a:srgbClr val="000000"/>
                   </a:solidFill>
@@ -17258,7 +17259,7 @@
             </a:ln>
             <a:extLst>
               <a:ext uri="{91240B29-F687-4f45-9708-019B960494DF}">
-                <a14:hiddenLine xmlns:a14="http://schemas.microsoft.com/office/drawing/2010/main" xmlns:p14="http://schemas.microsoft.com/office/powerpoint/2010/main" xmlns:a16="http://schemas.microsoft.com/office/drawing/2014/main" xmlns="" w="9525">
+                <a14:hiddenLine xmlns="" xmlns:a16="http://schemas.microsoft.com/office/drawing/2014/main" xmlns:p14="http://schemas.microsoft.com/office/powerpoint/2010/main" xmlns:a14="http://schemas.microsoft.com/office/drawing/2010/main" w="9525">
                   <a:solidFill>
                     <a:srgbClr val="000000"/>
                   </a:solidFill>
@@ -17370,7 +17371,7 @@
             </a:ln>
             <a:extLst>
               <a:ext uri="{91240B29-F687-4f45-9708-019B960494DF}">
-                <a14:hiddenLine xmlns:a14="http://schemas.microsoft.com/office/drawing/2010/main" xmlns:p14="http://schemas.microsoft.com/office/powerpoint/2010/main" xmlns:a16="http://schemas.microsoft.com/office/drawing/2014/main" xmlns="" w="9525">
+                <a14:hiddenLine xmlns="" xmlns:a16="http://schemas.microsoft.com/office/drawing/2014/main" xmlns:p14="http://schemas.microsoft.com/office/powerpoint/2010/main" xmlns:a14="http://schemas.microsoft.com/office/drawing/2010/main" w="9525">
                   <a:solidFill>
                     <a:srgbClr val="000000"/>
                   </a:solidFill>
@@ -17454,7 +17455,7 @@
             </a:ln>
             <a:extLst>
               <a:ext uri="{91240B29-F687-4f45-9708-019B960494DF}">
-                <a14:hiddenLine xmlns:a14="http://schemas.microsoft.com/office/drawing/2010/main" xmlns:p14="http://schemas.microsoft.com/office/powerpoint/2010/main" xmlns:a16="http://schemas.microsoft.com/office/drawing/2014/main" xmlns="" w="9525">
+                <a14:hiddenLine xmlns="" xmlns:a16="http://schemas.microsoft.com/office/drawing/2014/main" xmlns:p14="http://schemas.microsoft.com/office/powerpoint/2010/main" xmlns:a14="http://schemas.microsoft.com/office/drawing/2010/main" w="9525">
                   <a:solidFill>
                     <a:srgbClr val="000000"/>
                   </a:solidFill>
@@ -17566,7 +17567,7 @@
             </a:ln>
             <a:extLst>
               <a:ext uri="{91240B29-F687-4f45-9708-019B960494DF}">
-                <a14:hiddenLine xmlns:a14="http://schemas.microsoft.com/office/drawing/2010/main" xmlns:p14="http://schemas.microsoft.com/office/powerpoint/2010/main" xmlns:a16="http://schemas.microsoft.com/office/drawing/2014/main" xmlns="" w="9525">
+                <a14:hiddenLine xmlns="" xmlns:a16="http://schemas.microsoft.com/office/drawing/2014/main" xmlns:p14="http://schemas.microsoft.com/office/powerpoint/2010/main" xmlns:a14="http://schemas.microsoft.com/office/drawing/2010/main" w="9525">
                   <a:solidFill>
                     <a:srgbClr val="000000"/>
                   </a:solidFill>
@@ -17650,7 +17651,7 @@
             </a:ln>
             <a:extLst>
               <a:ext uri="{91240B29-F687-4f45-9708-019B960494DF}">
-                <a14:hiddenLine xmlns:a14="http://schemas.microsoft.com/office/drawing/2010/main" xmlns:p14="http://schemas.microsoft.com/office/powerpoint/2010/main" xmlns:a16="http://schemas.microsoft.com/office/drawing/2014/main" xmlns="" w="9525">
+                <a14:hiddenLine xmlns="" xmlns:a16="http://schemas.microsoft.com/office/drawing/2014/main" xmlns:p14="http://schemas.microsoft.com/office/powerpoint/2010/main" xmlns:a14="http://schemas.microsoft.com/office/drawing/2010/main" w="9525">
                   <a:solidFill>
                     <a:srgbClr val="000000"/>
                   </a:solidFill>
@@ -17734,7 +17735,7 @@
             </a:ln>
             <a:extLst>
               <a:ext uri="{91240B29-F687-4f45-9708-019B960494DF}">
-                <a14:hiddenLine xmlns:a14="http://schemas.microsoft.com/office/drawing/2010/main" xmlns:p14="http://schemas.microsoft.com/office/powerpoint/2010/main" xmlns:a16="http://schemas.microsoft.com/office/drawing/2014/main" xmlns="" w="9525">
+                <a14:hiddenLine xmlns="" xmlns:a16="http://schemas.microsoft.com/office/drawing/2014/main" xmlns:p14="http://schemas.microsoft.com/office/powerpoint/2010/main" xmlns:a14="http://schemas.microsoft.com/office/drawing/2010/main" w="9525">
                   <a:solidFill>
                     <a:srgbClr val="000000"/>
                   </a:solidFill>
@@ -17846,7 +17847,7 @@
             </a:ln>
             <a:extLst>
               <a:ext uri="{91240B29-F687-4f45-9708-019B960494DF}">
-                <a14:hiddenLine xmlns:a14="http://schemas.microsoft.com/office/drawing/2010/main" xmlns:p14="http://schemas.microsoft.com/office/powerpoint/2010/main" xmlns:a16="http://schemas.microsoft.com/office/drawing/2014/main" xmlns="" w="9525">
+                <a14:hiddenLine xmlns="" xmlns:a16="http://schemas.microsoft.com/office/drawing/2014/main" xmlns:p14="http://schemas.microsoft.com/office/powerpoint/2010/main" xmlns:a14="http://schemas.microsoft.com/office/drawing/2010/main" w="9525">
                   <a:solidFill>
                     <a:srgbClr val="000000"/>
                   </a:solidFill>
@@ -17958,7 +17959,7 @@
             </a:ln>
             <a:extLst>
               <a:ext uri="{91240B29-F687-4f45-9708-019B960494DF}">
-                <a14:hiddenLine xmlns:a14="http://schemas.microsoft.com/office/drawing/2010/main" xmlns:p14="http://schemas.microsoft.com/office/powerpoint/2010/main" xmlns:a16="http://schemas.microsoft.com/office/drawing/2014/main" xmlns="" w="9525">
+                <a14:hiddenLine xmlns="" xmlns:a16="http://schemas.microsoft.com/office/drawing/2014/main" xmlns:p14="http://schemas.microsoft.com/office/powerpoint/2010/main" xmlns:a14="http://schemas.microsoft.com/office/drawing/2010/main" w="9525">
                   <a:solidFill>
                     <a:srgbClr val="000000"/>
                   </a:solidFill>
@@ -18042,7 +18043,7 @@
             </a:ln>
             <a:extLst>
               <a:ext uri="{91240B29-F687-4f45-9708-019B960494DF}">
-                <a14:hiddenLine xmlns:a14="http://schemas.microsoft.com/office/drawing/2010/main" xmlns:p14="http://schemas.microsoft.com/office/powerpoint/2010/main" xmlns:a16="http://schemas.microsoft.com/office/drawing/2014/main" xmlns="" w="9525">
+                <a14:hiddenLine xmlns="" xmlns:a16="http://schemas.microsoft.com/office/drawing/2014/main" xmlns:p14="http://schemas.microsoft.com/office/powerpoint/2010/main" xmlns:a14="http://schemas.microsoft.com/office/drawing/2010/main" w="9525">
                   <a:solidFill>
                     <a:srgbClr val="000000"/>
                   </a:solidFill>
@@ -18174,7 +18175,7 @@
             </a:ln>
             <a:extLst>
               <a:ext uri="{91240B29-F687-4f45-9708-019B960494DF}">
-                <a14:hiddenLine xmlns:a14="http://schemas.microsoft.com/office/drawing/2010/main" xmlns:p14="http://schemas.microsoft.com/office/powerpoint/2010/main" xmlns:a16="http://schemas.microsoft.com/office/drawing/2014/main" xmlns="" w="9525">
+                <a14:hiddenLine xmlns="" xmlns:a16="http://schemas.microsoft.com/office/drawing/2014/main" xmlns:p14="http://schemas.microsoft.com/office/powerpoint/2010/main" xmlns:a14="http://schemas.microsoft.com/office/drawing/2010/main" w="9525">
                   <a:solidFill>
                     <a:srgbClr val="000000"/>
                   </a:solidFill>
@@ -18302,7 +18303,7 @@
             </a:ln>
             <a:extLst>
               <a:ext uri="{91240B29-F687-4f45-9708-019B960494DF}">
-                <a14:hiddenLine xmlns:a14="http://schemas.microsoft.com/office/drawing/2010/main" xmlns:p14="http://schemas.microsoft.com/office/powerpoint/2010/main" xmlns:a16="http://schemas.microsoft.com/office/drawing/2014/main" xmlns="" w="9525">
+                <a14:hiddenLine xmlns="" xmlns:a16="http://schemas.microsoft.com/office/drawing/2014/main" xmlns:p14="http://schemas.microsoft.com/office/powerpoint/2010/main" xmlns:a14="http://schemas.microsoft.com/office/drawing/2010/main" w="9525">
                   <a:solidFill>
                     <a:srgbClr val="000000"/>
                   </a:solidFill>
@@ -18386,7 +18387,7 @@
             </a:ln>
             <a:extLst>
               <a:ext uri="{91240B29-F687-4f45-9708-019B960494DF}">
-                <a14:hiddenLine xmlns:a14="http://schemas.microsoft.com/office/drawing/2010/main" xmlns:p14="http://schemas.microsoft.com/office/powerpoint/2010/main" xmlns:a16="http://schemas.microsoft.com/office/drawing/2014/main" xmlns="" w="9525">
+                <a14:hiddenLine xmlns="" xmlns:a16="http://schemas.microsoft.com/office/drawing/2014/main" xmlns:p14="http://schemas.microsoft.com/office/powerpoint/2010/main" xmlns:a14="http://schemas.microsoft.com/office/drawing/2010/main" w="9525">
                   <a:solidFill>
                     <a:srgbClr val="000000"/>
                   </a:solidFill>
@@ -18470,7 +18471,7 @@
             </a:ln>
             <a:extLst>
               <a:ext uri="{91240B29-F687-4f45-9708-019B960494DF}">
-                <a14:hiddenLine xmlns:a14="http://schemas.microsoft.com/office/drawing/2010/main" xmlns:p14="http://schemas.microsoft.com/office/powerpoint/2010/main" xmlns:a16="http://schemas.microsoft.com/office/drawing/2014/main" xmlns="" w="9525">
+                <a14:hiddenLine xmlns="" xmlns:a16="http://schemas.microsoft.com/office/drawing/2014/main" xmlns:p14="http://schemas.microsoft.com/office/powerpoint/2010/main" xmlns:a14="http://schemas.microsoft.com/office/drawing/2010/main" w="9525">
                   <a:solidFill>
                     <a:srgbClr val="000000"/>
                   </a:solidFill>
@@ -18582,7 +18583,7 @@
             </a:ln>
             <a:extLst>
               <a:ext uri="{91240B29-F687-4f45-9708-019B960494DF}">
-                <a14:hiddenLine xmlns:a14="http://schemas.microsoft.com/office/drawing/2010/main" xmlns:p14="http://schemas.microsoft.com/office/powerpoint/2010/main" xmlns:a16="http://schemas.microsoft.com/office/drawing/2014/main" xmlns="" w="9525">
+                <a14:hiddenLine xmlns="" xmlns:a16="http://schemas.microsoft.com/office/drawing/2014/main" xmlns:p14="http://schemas.microsoft.com/office/powerpoint/2010/main" xmlns:a14="http://schemas.microsoft.com/office/drawing/2010/main" w="9525">
                   <a:solidFill>
                     <a:srgbClr val="000000"/>
                   </a:solidFill>
@@ -18638,7 +18639,7 @@
             </a:ln>
             <a:extLst>
               <a:ext uri="{91240B29-F687-4f45-9708-019B960494DF}">
-                <a14:hiddenLine xmlns:a14="http://schemas.microsoft.com/office/drawing/2010/main" xmlns:p14="http://schemas.microsoft.com/office/powerpoint/2010/main" xmlns:a16="http://schemas.microsoft.com/office/drawing/2014/main" xmlns="" w="9525">
+                <a14:hiddenLine xmlns="" xmlns:a16="http://schemas.microsoft.com/office/drawing/2014/main" xmlns:p14="http://schemas.microsoft.com/office/powerpoint/2010/main" xmlns:a14="http://schemas.microsoft.com/office/drawing/2010/main" w="9525">
                   <a:solidFill>
                     <a:srgbClr val="000000"/>
                   </a:solidFill>
@@ -18725,7 +18726,7 @@
             </a:ln>
             <a:extLst>
               <a:ext uri="{91240B29-F687-4f45-9708-019B960494DF}">
-                <a14:hiddenLine xmlns:a14="http://schemas.microsoft.com/office/drawing/2010/main" xmlns:p14="http://schemas.microsoft.com/office/powerpoint/2010/main" xmlns:a16="http://schemas.microsoft.com/office/drawing/2014/main" xmlns="" w="9525">
+                <a14:hiddenLine xmlns="" xmlns:a16="http://schemas.microsoft.com/office/drawing/2014/main" xmlns:p14="http://schemas.microsoft.com/office/powerpoint/2010/main" xmlns:a14="http://schemas.microsoft.com/office/drawing/2010/main" w="9525">
                   <a:solidFill>
                     <a:srgbClr val="000000"/>
                   </a:solidFill>
@@ -18837,7 +18838,7 @@
             </a:ln>
             <a:extLst>
               <a:ext uri="{91240B29-F687-4f45-9708-019B960494DF}">
-                <a14:hiddenLine xmlns:a14="http://schemas.microsoft.com/office/drawing/2010/main" xmlns:p14="http://schemas.microsoft.com/office/powerpoint/2010/main" xmlns:a16="http://schemas.microsoft.com/office/drawing/2014/main" xmlns="" w="9525">
+                <a14:hiddenLine xmlns="" xmlns:a16="http://schemas.microsoft.com/office/drawing/2014/main" xmlns:p14="http://schemas.microsoft.com/office/powerpoint/2010/main" xmlns:a14="http://schemas.microsoft.com/office/drawing/2010/main" w="9525">
                   <a:solidFill>
                     <a:srgbClr val="000000"/>
                   </a:solidFill>
@@ -18921,7 +18922,7 @@
             </a:ln>
             <a:extLst>
               <a:ext uri="{91240B29-F687-4f45-9708-019B960494DF}">
-                <a14:hiddenLine xmlns:a14="http://schemas.microsoft.com/office/drawing/2010/main" xmlns:p14="http://schemas.microsoft.com/office/powerpoint/2010/main" xmlns:a16="http://schemas.microsoft.com/office/drawing/2014/main" xmlns="" w="9525">
+                <a14:hiddenLine xmlns="" xmlns:a16="http://schemas.microsoft.com/office/drawing/2014/main" xmlns:p14="http://schemas.microsoft.com/office/powerpoint/2010/main" xmlns:a14="http://schemas.microsoft.com/office/drawing/2010/main" w="9525">
                   <a:solidFill>
                     <a:srgbClr val="000000"/>
                   </a:solidFill>
@@ -19033,7 +19034,7 @@
             </a:ln>
             <a:extLst>
               <a:ext uri="{91240B29-F687-4f45-9708-019B960494DF}">
-                <a14:hiddenLine xmlns:a14="http://schemas.microsoft.com/office/drawing/2010/main" xmlns:p14="http://schemas.microsoft.com/office/powerpoint/2010/main" xmlns:a16="http://schemas.microsoft.com/office/drawing/2014/main" xmlns="" w="9525">
+                <a14:hiddenLine xmlns="" xmlns:a16="http://schemas.microsoft.com/office/drawing/2014/main" xmlns:p14="http://schemas.microsoft.com/office/powerpoint/2010/main" xmlns:a14="http://schemas.microsoft.com/office/drawing/2010/main" w="9525">
                   <a:solidFill>
                     <a:srgbClr val="000000"/>
                   </a:solidFill>
@@ -19120,7 +19121,7 @@
             </a:ln>
             <a:extLst>
               <a:ext uri="{91240B29-F687-4f45-9708-019B960494DF}">
-                <a14:hiddenLine xmlns:a14="http://schemas.microsoft.com/office/drawing/2010/main" xmlns:p14="http://schemas.microsoft.com/office/powerpoint/2010/main" xmlns:a16="http://schemas.microsoft.com/office/drawing/2014/main" xmlns="" w="9525">
+                <a14:hiddenLine xmlns="" xmlns:a16="http://schemas.microsoft.com/office/drawing/2014/main" xmlns:p14="http://schemas.microsoft.com/office/powerpoint/2010/main" xmlns:a14="http://schemas.microsoft.com/office/drawing/2010/main" w="9525">
                   <a:solidFill>
                     <a:srgbClr val="000000"/>
                   </a:solidFill>
@@ -19204,7 +19205,7 @@
             </a:ln>
             <a:extLst>
               <a:ext uri="{91240B29-F687-4f45-9708-019B960494DF}">
-                <a14:hiddenLine xmlns:a14="http://schemas.microsoft.com/office/drawing/2010/main" xmlns:p14="http://schemas.microsoft.com/office/powerpoint/2010/main" xmlns:a16="http://schemas.microsoft.com/office/drawing/2014/main" xmlns="" w="9525">
+                <a14:hiddenLine xmlns="" xmlns:a16="http://schemas.microsoft.com/office/drawing/2014/main" xmlns:p14="http://schemas.microsoft.com/office/powerpoint/2010/main" xmlns:a14="http://schemas.microsoft.com/office/drawing/2010/main" w="9525">
                   <a:solidFill>
                     <a:srgbClr val="000000"/>
                   </a:solidFill>
@@ -19316,7 +19317,7 @@
             </a:ln>
             <a:extLst>
               <a:ext uri="{91240B29-F687-4f45-9708-019B960494DF}">
-                <a14:hiddenLine xmlns:a14="http://schemas.microsoft.com/office/drawing/2010/main" xmlns:p14="http://schemas.microsoft.com/office/powerpoint/2010/main" xmlns:a16="http://schemas.microsoft.com/office/drawing/2014/main" xmlns="" w="9525">
+                <a14:hiddenLine xmlns="" xmlns:a16="http://schemas.microsoft.com/office/drawing/2014/main" xmlns:p14="http://schemas.microsoft.com/office/powerpoint/2010/main" xmlns:a14="http://schemas.microsoft.com/office/drawing/2010/main" w="9525">
                   <a:solidFill>
                     <a:srgbClr val="000000"/>
                   </a:solidFill>
@@ -19428,7 +19429,7 @@
             </a:ln>
             <a:extLst>
               <a:ext uri="{91240B29-F687-4f45-9708-019B960494DF}">
-                <a14:hiddenLine xmlns:a14="http://schemas.microsoft.com/office/drawing/2010/main" xmlns:p14="http://schemas.microsoft.com/office/powerpoint/2010/main" xmlns:a16="http://schemas.microsoft.com/office/drawing/2014/main" xmlns="" w="9525">
+                <a14:hiddenLine xmlns="" xmlns:a16="http://schemas.microsoft.com/office/drawing/2014/main" xmlns:p14="http://schemas.microsoft.com/office/powerpoint/2010/main" xmlns:a14="http://schemas.microsoft.com/office/drawing/2010/main" w="9525">
                   <a:solidFill>
                     <a:srgbClr val="000000"/>
                   </a:solidFill>
@@ -19515,7 +19516,7 @@
             </a:ln>
             <a:extLst>
               <a:ext uri="{91240B29-F687-4f45-9708-019B960494DF}">
-                <a14:hiddenLine xmlns:a14="http://schemas.microsoft.com/office/drawing/2010/main" xmlns:p14="http://schemas.microsoft.com/office/powerpoint/2010/main" xmlns:a16="http://schemas.microsoft.com/office/drawing/2014/main" xmlns="" w="9525">
+                <a14:hiddenLine xmlns="" xmlns:a16="http://schemas.microsoft.com/office/drawing/2014/main" xmlns:p14="http://schemas.microsoft.com/office/powerpoint/2010/main" xmlns:a14="http://schemas.microsoft.com/office/drawing/2010/main" w="9525">
                   <a:solidFill>
                     <a:srgbClr val="000000"/>
                   </a:solidFill>
@@ -19657,7 +19658,7 @@
             </a:ln>
             <a:extLst>
               <a:ext uri="{91240B29-F687-4f45-9708-019B960494DF}">
-                <a14:hiddenLine xmlns:a14="http://schemas.microsoft.com/office/drawing/2010/main" xmlns:p14="http://schemas.microsoft.com/office/powerpoint/2010/main" xmlns:a16="http://schemas.microsoft.com/office/drawing/2014/main" xmlns="" w="9525">
+                <a14:hiddenLine xmlns="" xmlns:a16="http://schemas.microsoft.com/office/drawing/2014/main" xmlns:p14="http://schemas.microsoft.com/office/powerpoint/2010/main" xmlns:a14="http://schemas.microsoft.com/office/drawing/2010/main" w="9525">
                   <a:solidFill>
                     <a:srgbClr val="000000"/>
                   </a:solidFill>
@@ -19905,6 +19906,106 @@
 </file>
 
 <file path=ppt/slides/slide20.xml><?xml version="1.0" encoding="utf-8"?>
+<p:sld xmlns:a="http://schemas.openxmlformats.org/drawingml/2006/main" xmlns:r="http://schemas.openxmlformats.org/officeDocument/2006/relationships" xmlns:p="http://schemas.openxmlformats.org/presentationml/2006/main">
+  <p:cSld>
+    <p:spTree>
+      <p:nvGrpSpPr>
+        <p:cNvPr id="1" name="">
+          <a:extLst>
+            <a:ext uri="{FF2B5EF4-FFF2-40B4-BE49-F238E27FC236}">
+              <a16:creationId xmlns:a16="http://schemas.microsoft.com/office/drawing/2014/main" id="{C0BB67F8-FE87-1C1B-2639-42EFD909B6D8}"/>
+            </a:ext>
+          </a:extLst>
+        </p:cNvPr>
+        <p:cNvGrpSpPr/>
+        <p:nvPr/>
+      </p:nvGrpSpPr>
+      <p:grpSpPr>
+        <a:xfrm>
+          <a:off x="0" y="0"/>
+          <a:ext cx="0" cy="0"/>
+          <a:chOff x="0" y="0"/>
+          <a:chExt cx="0" cy="0"/>
+        </a:xfrm>
+      </p:grpSpPr>
+      <p:sp>
+        <p:nvSpPr>
+          <p:cNvPr id="2" name="Título 1">
+            <a:extLst>
+              <a:ext uri="{FF2B5EF4-FFF2-40B4-BE49-F238E27FC236}">
+                <a16:creationId xmlns:a16="http://schemas.microsoft.com/office/drawing/2014/main" id="{AA946CB4-6FE7-8009-73EB-C4CCE345AAEE}"/>
+              </a:ext>
+            </a:extLst>
+          </p:cNvPr>
+          <p:cNvSpPr>
+            <a:spLocks noGrp="1"/>
+          </p:cNvSpPr>
+          <p:nvPr>
+            <p:ph type="title"/>
+          </p:nvPr>
+        </p:nvSpPr>
+        <p:spPr/>
+        <p:txBody>
+          <a:bodyPr/>
+          <a:lstStyle/>
+          <a:p>
+            <a:r>
+              <a:rPr lang="pt-PT" dirty="0"/>
+              <a:t>Trabalhos Futuros</a:t>
+            </a:r>
+          </a:p>
+        </p:txBody>
+      </p:sp>
+      <p:sp>
+        <p:nvSpPr>
+          <p:cNvPr id="3" name="Espaço Reservado para Conteúdo 2">
+            <a:extLst>
+              <a:ext uri="{FF2B5EF4-FFF2-40B4-BE49-F238E27FC236}">
+                <a16:creationId xmlns:a16="http://schemas.microsoft.com/office/drawing/2014/main" id="{F729D733-DD6F-3755-00AC-6376BEDDCC16}"/>
+              </a:ext>
+            </a:extLst>
+          </p:cNvPr>
+          <p:cNvSpPr>
+            <a:spLocks noGrp="1"/>
+          </p:cNvSpPr>
+          <p:nvPr>
+            <p:ph idx="1"/>
+          </p:nvPr>
+        </p:nvSpPr>
+        <p:spPr/>
+        <p:txBody>
+          <a:bodyPr>
+            <a:normAutofit/>
+          </a:bodyPr>
+          <a:lstStyle/>
+          <a:p>
+            <a:r>
+              <a:rPr lang="pt-PT" dirty="0"/>
+              <a:t>Nossa memória atual pode crescer com novos termos. Uma WiSARD exige uma entrada de dimensão fixa; </a:t>
+            </a:r>
+          </a:p>
+          <a:p>
+            <a:r>
+              <a:rPr lang="pt-PT" dirty="0"/>
+              <a:t>por isso, como trabalho futuro, vamos avaliar congelamento de vocabulário ou hashing de características para tornar essa integração incremental e experimentalmente comparável.</a:t>
+            </a:r>
+          </a:p>
+        </p:txBody>
+      </p:sp>
+    </p:spTree>
+    <p:extLst>
+      <p:ext uri="{BB962C8B-B14F-4D97-AF65-F5344CB8AC3E}">
+        <p14:creationId xmlns:p14="http://schemas.microsoft.com/office/powerpoint/2010/main" val="2651206013"/>
+      </p:ext>
+    </p:extLst>
+  </p:cSld>
+  <p:clrMapOvr>
+    <a:masterClrMapping/>
+  </p:clrMapOvr>
+</p:sld>
+</file>
+
+<file path=ppt/slides/slide21.xml><?xml version="1.0" encoding="utf-8"?>
 <p:sld xmlns:a="http://schemas.openxmlformats.org/drawingml/2006/main" xmlns:r="http://schemas.openxmlformats.org/officeDocument/2006/relationships" xmlns:p="http://schemas.openxmlformats.org/presentationml/2006/main">
   <p:cSld>
     <p:spTree>
